--- a/자료/발표자료-KIOSSON.pptx
+++ b/자료/발표자료-KIOSSON.pptx
@@ -1,24 +1,24 @@
 
 <file path=ppt/presentation.xml><?xml version="1.0" encoding="utf-8"?>
-<p:presentation xmlns:a="http://schemas.openxmlformats.org/drawingml/2006/main" xmlns:r="http://schemas.openxmlformats.org/officeDocument/2006/relationships" xmlns:p="http://schemas.openxmlformats.org/presentationml/2006/main" saveSubsetFonts="1" autoCompressPictures="0">
+<p:presentation xmlns:r="http://schemas.openxmlformats.org/officeDocument/2006/relationships" xmlns:c="http://schemas.openxmlformats.org/drawingml/2006/chart" xmlns:a="http://schemas.openxmlformats.org/drawingml/2006/main" xmlns:dgm="http://schemas.openxmlformats.org/drawingml/2006/diagram" xmlns:dsp="http://schemas.microsoft.com/office/drawing/2008/diagram" xmlns:p="http://schemas.openxmlformats.org/presentationml/2006/main" autoCompressPictures="0">
   <p:sldMasterIdLst>
     <p:sldMasterId id="2147483648" r:id="rId1"/>
   </p:sldMasterIdLst>
+  <p:notesMasterIdLst>
+    <p:notesMasterId r:id="rId2"/>
+  </p:notesMasterIdLst>
   <p:sldIdLst>
-    <p:sldId id="256" r:id="rId2"/>
-    <p:sldId id="257" r:id="rId3"/>
-    <p:sldId id="258" r:id="rId4"/>
-    <p:sldId id="259" r:id="rId5"/>
-    <p:sldId id="260" r:id="rId6"/>
-    <p:sldId id="261" r:id="rId7"/>
-    <p:sldId id="262" r:id="rId8"/>
-    <p:sldId id="263" r:id="rId9"/>
-    <p:sldId id="264" r:id="rId10"/>
-    <p:sldId id="265" r:id="rId11"/>
+    <p:sldId id="256" r:id="rId3"/>
+    <p:sldId id="257" r:id="rId4"/>
+    <p:sldId id="258" r:id="rId5"/>
+    <p:sldId id="259" r:id="rId6"/>
+    <p:sldId id="260" r:id="rId7"/>
+    <p:sldId id="261" r:id="rId8"/>
+    <p:sldId id="262" r:id="rId9"/>
+    <p:sldId id="263" r:id="rId10"/>
+    <p:sldId id="264" r:id="rId11"/>
+    <p:sldId id="265" r:id="rId12"/>
   </p:sldIdLst>
-  <p:notesMasterIdLst>
-    <p:notesMasterId r:id="rId12"/>
-  </p:notesMasterIdLst>
   <p:sldSz cx="12192000" cy="6858000"/>
   <p:notesSz cx="6858000" cy="12192000"/>
   <p:defaultTextStyle>
@@ -117,7 +117,7 @@
 </file>
 
 <file path=ppt/notesMasters/notesMaster1.xml><?xml version="1.0" encoding="utf-8"?>
-<p:notesMaster xmlns:a="http://schemas.openxmlformats.org/drawingml/2006/main" xmlns:r="http://schemas.openxmlformats.org/officeDocument/2006/relationships" xmlns:p="http://schemas.openxmlformats.org/presentationml/2006/main">
+<p:notesMaster xmlns:r="http://schemas.openxmlformats.org/officeDocument/2006/relationships" xmlns:c="http://schemas.openxmlformats.org/drawingml/2006/chart" xmlns:a="http://schemas.openxmlformats.org/drawingml/2006/main" xmlns:dgm="http://schemas.openxmlformats.org/drawingml/2006/diagram" xmlns:dsp="http://schemas.microsoft.com/office/drawing/2008/diagram" xmlns:p="http://schemas.openxmlformats.org/presentationml/2006/main">
   <p:cSld>
     <p:bg>
       <p:bgRef idx="1001">
@@ -145,7 +145,7 @@
             <a:spLocks noGrp="1"/>
           </p:cNvSpPr>
           <p:nvPr>
-            <p:ph type="hdr" sz="quarter"/>
+            <p:ph type="hdr" sz="quarter" idx="0"/>
           </p:nvPr>
         </p:nvSpPr>
         <p:spPr>
@@ -165,6 +165,7 @@
             </a:lvl1pPr>
           </a:lstStyle>
           <a:p>
+            <a:pPr lvl="0"/>
             <a:endParaRPr lang="en-US"/>
           </a:p>
         </p:txBody>
@@ -196,7 +197,8 @@
             </a:lvl1pPr>
           </a:lstStyle>
           <a:p>
-            <a:fld id="{5282F153-3F37-0F45-9E97-73ACFA13230C}" type="datetimeFigureOut">
+            <a:pPr lvl="0"/>
+            <a:fld id="{5282F153-3F37-0F45-9E97-73ACFA13230C}" type="datetime1">
               <a:rPr lang="en-US"/>
               <a:t>7/23/19</a:t>
             </a:fld>
@@ -208,7 +210,7 @@
         <p:nvSpPr>
           <p:cNvPr id="4" name="Slide Image Placeholder 3"/>
           <p:cNvSpPr>
-            <a:spLocks noGrp="1" noRot="1" noChangeAspect="1"/>
+            <a:spLocks noGrp="1" noRot="1" noChangeAspect="1" noTextEdit="1"/>
           </p:cNvSpPr>
           <p:nvPr>
             <p:ph type="sldImg" idx="2"/>
@@ -233,6 +235,7 @@
           <a:bodyPr vert="horz" lIns="91440" tIns="45720" rIns="91440" bIns="45720" rtlCol="0" anchor="ctr"/>
           <a:lstStyle/>
           <a:p>
+            <a:pPr lvl="0"/>
             <a:endParaRPr lang="en-US"/>
           </a:p>
         </p:txBody>
@@ -323,6 +326,7 @@
             </a:lvl1pPr>
           </a:lstStyle>
           <a:p>
+            <a:pPr lvl="0"/>
             <a:endParaRPr lang="en-US"/>
           </a:p>
         </p:txBody>
@@ -354,6 +358,7 @@
             </a:lvl1pPr>
           </a:lstStyle>
           <a:p>
+            <a:pPr lvl="0"/>
             <a:fld id="{CE5E9CC1-C706-0F49-92D6-E571CC5EEA8F}" type="slidenum">
               <a:rPr lang="en-US"/>
               <a:t>‹#›</a:t>
@@ -370,6 +375,7 @@
     </p:extLst>
   </p:cSld>
   <p:clrMap bg1="lt1" tx1="dk1" bg2="lt2" tx2="dk2" accent1="accent1" accent2="accent2" accent3="accent3" accent4="accent4" accent5="accent5" accent6="accent6" hlink="hlink" folHlink="folHlink"/>
+  <p:hf hdr="0" ftr="0" dt="0"/>
   <p:notesStyle>
     <a:lvl1pPr marL="0" algn="l" defTabSz="914400" rtl="0" eaLnBrk="1" latinLnBrk="0" hangingPunct="1">
       <a:defRPr sz="1200" kern="1200">
@@ -2236,12 +2242,12 @@
 </file>
 
 <file path=ppt/slides/slide2.xml><?xml version="1.0" encoding="utf-8"?>
-<p:sld xmlns:a="http://schemas.openxmlformats.org/drawingml/2006/main" xmlns:r="http://schemas.openxmlformats.org/officeDocument/2006/relationships" xmlns:p="http://schemas.openxmlformats.org/presentationml/2006/main">
+<p:sld xmlns:r="http://schemas.openxmlformats.org/officeDocument/2006/relationships" xmlns:c="http://schemas.openxmlformats.org/drawingml/2006/chart" xmlns:a="http://schemas.openxmlformats.org/drawingml/2006/main" xmlns:dgm="http://schemas.openxmlformats.org/drawingml/2006/diagram" xmlns:dsp="http://schemas.microsoft.com/office/drawing/2008/diagram" xmlns:p="http://schemas.openxmlformats.org/presentationml/2006/main">
   <p:cSld name="Slide 2">
     <p:bg>
-      <p:bgPr>
+      <p:bgPr shadeToTitle="0">
         <a:solidFill>
-          <a:srgbClr val="F7F6F2"/>
+          <a:srgbClr val="f7f6f2"/>
         </a:solidFill>
       </p:bgPr>
     </p:bg>
@@ -2739,24 +2745,25 @@
           <a:ln/>
         </p:spPr>
         <p:txBody>
-          <a:bodyPr wrap="square" lIns="0" tIns="0" rIns="0" bIns="0" rtlCol="0" anchor="t"/>
-          <a:lstStyle/>
-          <a:p>
-            <a:pPr eaLnBrk="0" indent="0" marL="0">
-              <a:buNone/>
-            </a:pPr>
-            <a:r>
-              <a:rPr lang="ko-KR" altLang="en-US" sz="1200" dirty="0">
-                <a:solidFill>
-                  <a:srgbClr val="6A7180"/>
-                </a:solidFill>
-                <a:latin typeface="맑은 고딕" pitchFamily="34" charset="0"/>
-                <a:ea typeface="맑은 고딕" pitchFamily="34" charset="-127"/>
-                <a:cs typeface="맑은 고딕" pitchFamily="34" charset="-120"/>
-              </a:rPr>
-              <a:t>출처: 과학기술정보통신부(이투데이), 서울디지털재단 2023, 보건복지부 2024 · 발표 정윤서</a:t>
-            </a:r>
-            <a:endParaRPr lang="ko-KR" altLang="en-US" sz="1200" dirty="0"/>
+          <a:bodyPr wrap="square" lIns="0" tIns="0" rIns="0" bIns="0" anchor="t"/>
+          <a:lstStyle/>
+          <a:p>
+            <a:pPr marL="0" lvl="0" indent="0" eaLnBrk="0">
+              <a:buNone/>
+              <a:defRPr/>
+            </a:pPr>
+            <a:r>
+              <a:rPr lang="ko-KR" altLang="en-US" sz="1200">
+                <a:solidFill>
+                  <a:srgbClr val="6a7180"/>
+                </a:solidFill>
+                <a:latin typeface="맑은 고딕"/>
+                <a:ea typeface="맑은 고딕"/>
+                <a:cs typeface="맑은 고딕"/>
+              </a:rPr>
+              <a:t>출처: 과학기술정보통신부(이투데이), 서울디지털재단 2023, 보건복지부 2024 ·</a:t>
+            </a:r>
+            <a:endParaRPr lang="ko-KR" altLang="en-US" sz="1200"/>
           </a:p>
         </p:txBody>
       </p:sp>
@@ -2808,12 +2815,12 @@
 </file>
 
 <file path=ppt/slides/slide3.xml><?xml version="1.0" encoding="utf-8"?>
-<p:sld xmlns:a="http://schemas.openxmlformats.org/drawingml/2006/main" xmlns:r="http://schemas.openxmlformats.org/officeDocument/2006/relationships" xmlns:p="http://schemas.openxmlformats.org/presentationml/2006/main">
+<p:sld xmlns:r="http://schemas.openxmlformats.org/officeDocument/2006/relationships" xmlns:c="http://schemas.openxmlformats.org/drawingml/2006/chart" xmlns:a="http://schemas.openxmlformats.org/drawingml/2006/main" xmlns:dgm="http://schemas.openxmlformats.org/drawingml/2006/diagram" xmlns:dsp="http://schemas.microsoft.com/office/drawing/2008/diagram" xmlns:p="http://schemas.openxmlformats.org/presentationml/2006/main">
   <p:cSld name="Slide 3">
     <p:bg>
-      <p:bgPr>
+      <p:bgPr shadeToTitle="0">
         <a:solidFill>
-          <a:srgbClr val="F7F6F2"/>
+          <a:srgbClr val="f7f6f2"/>
         </a:solidFill>
       </p:bgPr>
     </p:bg>
@@ -3368,45 +3375,6 @@
       </p:sp>
       <p:sp>
         <p:nvSpPr>
-          <p:cNvPr id="17" name="Text 15"/>
-          <p:cNvSpPr txBox="1"/>
-          <p:nvPr/>
-        </p:nvSpPr>
-        <p:spPr>
-          <a:xfrm>
-            <a:off x="812800" y="6223000"/>
-            <a:ext cx="8890000" cy="228600"/>
-          </a:xfrm>
-          <a:prstGeom prst="rect">
-            <a:avLst/>
-          </a:prstGeom>
-          <a:noFill/>
-          <a:ln/>
-        </p:spPr>
-        <p:txBody>
-          <a:bodyPr wrap="square" lIns="0" tIns="0" rIns="0" bIns="0" rtlCol="0" anchor="t"/>
-          <a:lstStyle/>
-          <a:p>
-            <a:pPr eaLnBrk="0" indent="0" marL="0">
-              <a:buNone/>
-            </a:pPr>
-            <a:r>
-              <a:rPr lang="ko-KR" altLang="en-US" sz="1200" dirty="0">
-                <a:solidFill>
-                  <a:srgbClr val="6A7180"/>
-                </a:solidFill>
-                <a:latin typeface="맑은 고딕" pitchFamily="34" charset="0"/>
-                <a:ea typeface="맑은 고딕" pitchFamily="34" charset="-127"/>
-                <a:cs typeface="맑은 고딕" pitchFamily="34" charset="-120"/>
-              </a:rPr>
-              <a:t>발표 정윤서</a:t>
-            </a:r>
-            <a:endParaRPr lang="ko-KR" altLang="en-US" sz="1200" dirty="0"/>
-          </a:p>
-        </p:txBody>
-      </p:sp>
-      <p:sp>
-        <p:nvSpPr>
           <p:cNvPr id="18" name="Text 16"/>
           <p:cNvSpPr txBox="1"/>
           <p:nvPr/>
@@ -3453,12 +3421,12 @@
 </file>
 
 <file path=ppt/slides/slide4.xml><?xml version="1.0" encoding="utf-8"?>
-<p:sld xmlns:a="http://schemas.openxmlformats.org/drawingml/2006/main" xmlns:r="http://schemas.openxmlformats.org/officeDocument/2006/relationships" xmlns:p="http://schemas.openxmlformats.org/presentationml/2006/main">
+<p:sld xmlns:r="http://schemas.openxmlformats.org/officeDocument/2006/relationships" xmlns:c="http://schemas.openxmlformats.org/drawingml/2006/chart" xmlns:a="http://schemas.openxmlformats.org/drawingml/2006/main" xmlns:dgm="http://schemas.openxmlformats.org/drawingml/2006/diagram" xmlns:dsp="http://schemas.microsoft.com/office/drawing/2008/diagram" xmlns:p="http://schemas.openxmlformats.org/presentationml/2006/main">
   <p:cSld name="Slide 4">
     <p:bg>
-      <p:bgPr>
+      <p:bgPr shadeToTitle="0">
         <a:solidFill>
-          <a:srgbClr val="F7F6F2"/>
+          <a:srgbClr val="f7f6f2"/>
         </a:solidFill>
       </p:bgPr>
     </p:bg>
@@ -3585,7 +3553,7 @@
           <p:nvPr/>
         </p:nvPicPr>
         <p:blipFill>
-          <a:blip r:embed="rId1"/>
+          <a:blip r:embed="rId3"/>
           <a:stretch>
             <a:fillRect/>
           </a:stretch>
@@ -3631,7 +3599,7 @@
           <p:nvPr/>
         </p:nvPicPr>
         <p:blipFill>
-          <a:blip r:embed="rId2"/>
+          <a:blip r:embed="rId4"/>
           <a:stretch>
             <a:fillRect/>
           </a:stretch>
@@ -3879,84 +3847,6 @@
               <a:t>누르면 바뀐 화면을 자동 인식, 완료까지</a:t>
             </a:r>
             <a:endParaRPr lang="ko-KR" altLang="en-US" sz="1500" dirty="0"/>
-          </a:p>
-        </p:txBody>
-      </p:sp>
-      <p:sp>
-        <p:nvSpPr>
-          <p:cNvPr id="12" name="Text 8"/>
-          <p:cNvSpPr txBox="1"/>
-          <p:nvPr/>
-        </p:nvSpPr>
-        <p:spPr>
-          <a:xfrm>
-            <a:off x="8483600" y="5207000"/>
-            <a:ext cx="2895600" cy="317500"/>
-          </a:xfrm>
-          <a:prstGeom prst="rect">
-            <a:avLst/>
-          </a:prstGeom>
-          <a:noFill/>
-          <a:ln/>
-        </p:spPr>
-        <p:txBody>
-          <a:bodyPr wrap="square" lIns="0" tIns="0" rIns="0" bIns="0" rtlCol="0" anchor="t"/>
-          <a:lstStyle/>
-          <a:p>
-            <a:pPr eaLnBrk="0" indent="0" marL="0">
-              <a:buNone/>
-            </a:pPr>
-            <a:r>
-              <a:rPr lang="ko-KR" altLang="en-US" sz="1300" dirty="0">
-                <a:solidFill>
-                  <a:srgbClr val="6A7180"/>
-                </a:solidFill>
-                <a:latin typeface="맑은 고딕" pitchFamily="34" charset="0"/>
-                <a:ea typeface="맑은 고딕" pitchFamily="34" charset="-127"/>
-                <a:cs typeface="맑은 고딕" pitchFamily="34" charset="-120"/>
-              </a:rPr>
-              <a:t>앱 설치 없이 링크로 여는 모바일 웹</a:t>
-            </a:r>
-            <a:endParaRPr lang="ko-KR" altLang="en-US" sz="1300" dirty="0"/>
-          </a:p>
-        </p:txBody>
-      </p:sp>
-      <p:sp>
-        <p:nvSpPr>
-          <p:cNvPr id="13" name="Text 9"/>
-          <p:cNvSpPr txBox="1"/>
-          <p:nvPr/>
-        </p:nvSpPr>
-        <p:spPr>
-          <a:xfrm>
-            <a:off x="812800" y="6223000"/>
-            <a:ext cx="8890000" cy="228600"/>
-          </a:xfrm>
-          <a:prstGeom prst="rect">
-            <a:avLst/>
-          </a:prstGeom>
-          <a:noFill/>
-          <a:ln/>
-        </p:spPr>
-        <p:txBody>
-          <a:bodyPr wrap="square" lIns="0" tIns="0" rIns="0" bIns="0" rtlCol="0" anchor="t"/>
-          <a:lstStyle/>
-          <a:p>
-            <a:pPr eaLnBrk="0" indent="0" marL="0">
-              <a:buNone/>
-            </a:pPr>
-            <a:r>
-              <a:rPr lang="ko-KR" altLang="en-US" sz="1200" dirty="0">
-                <a:solidFill>
-                  <a:srgbClr val="6A7180"/>
-                </a:solidFill>
-                <a:latin typeface="맑은 고딕" pitchFamily="34" charset="0"/>
-                <a:ea typeface="맑은 고딕" pitchFamily="34" charset="-127"/>
-                <a:cs typeface="맑은 고딕" pitchFamily="34" charset="-120"/>
-              </a:rPr>
-              <a:t>발표 정윤서</a:t>
-            </a:r>
-            <a:endParaRPr lang="ko-KR" altLang="en-US" sz="1200" dirty="0"/>
           </a:p>
         </p:txBody>
       </p:sp>
@@ -4008,12 +3898,12 @@
 </file>
 
 <file path=ppt/slides/slide5.xml><?xml version="1.0" encoding="utf-8"?>
-<p:sld xmlns:a="http://schemas.openxmlformats.org/drawingml/2006/main" xmlns:r="http://schemas.openxmlformats.org/officeDocument/2006/relationships" xmlns:p="http://schemas.openxmlformats.org/presentationml/2006/main">
+<p:sld xmlns:r="http://schemas.openxmlformats.org/officeDocument/2006/relationships" xmlns:c="http://schemas.openxmlformats.org/drawingml/2006/chart" xmlns:a="http://schemas.openxmlformats.org/drawingml/2006/main" xmlns:dgm="http://schemas.openxmlformats.org/drawingml/2006/diagram" xmlns:dsp="http://schemas.microsoft.com/office/drawing/2008/diagram" xmlns:p="http://schemas.openxmlformats.org/presentationml/2006/main">
   <p:cSld name="Slide 5">
     <p:bg>
-      <p:bgPr>
+      <p:bgPr shadeToTitle="0">
         <a:solidFill>
-          <a:srgbClr val="ECEAE3"/>
+          <a:srgbClr val="eceae3"/>
         </a:solidFill>
       </p:bgPr>
     </p:bg>
@@ -4140,7 +4030,7 @@
           <p:nvPr/>
         </p:nvPicPr>
         <p:blipFill>
-          <a:blip r:embed="rId1"/>
+          <a:blip r:embed="rId3"/>
           <a:stretch>
             <a:fillRect/>
           </a:stretch>
@@ -4155,45 +4045,6 @@
           </a:prstGeom>
         </p:spPr>
       </p:pic>
-      <p:sp>
-        <p:nvSpPr>
-          <p:cNvPr id="6" name="Text 3"/>
-          <p:cNvSpPr txBox="1"/>
-          <p:nvPr/>
-        </p:nvSpPr>
-        <p:spPr>
-          <a:xfrm>
-            <a:off x="812800" y="6223000"/>
-            <a:ext cx="8890000" cy="228600"/>
-          </a:xfrm>
-          <a:prstGeom prst="rect">
-            <a:avLst/>
-          </a:prstGeom>
-          <a:noFill/>
-          <a:ln/>
-        </p:spPr>
-        <p:txBody>
-          <a:bodyPr wrap="square" lIns="0" tIns="0" rIns="0" bIns="0" rtlCol="0" anchor="t"/>
-          <a:lstStyle/>
-          <a:p>
-            <a:pPr eaLnBrk="0" indent="0" marL="0">
-              <a:buNone/>
-            </a:pPr>
-            <a:r>
-              <a:rPr lang="ko-KR" altLang="en-US" sz="1200" dirty="0">
-                <a:solidFill>
-                  <a:srgbClr val="6A7180"/>
-                </a:solidFill>
-                <a:latin typeface="맑은 고딕" pitchFamily="34" charset="0"/>
-                <a:ea typeface="맑은 고딕" pitchFamily="34" charset="-127"/>
-                <a:cs typeface="맑은 고딕" pitchFamily="34" charset="-120"/>
-              </a:rPr>
-              <a:t>발표 정윤서</a:t>
-            </a:r>
-            <a:endParaRPr lang="ko-KR" altLang="en-US" sz="1200" dirty="0"/>
-          </a:p>
-        </p:txBody>
-      </p:sp>
       <p:sp>
         <p:nvSpPr>
           <p:cNvPr id="7" name="Text 4"/>
@@ -4242,12 +4093,12 @@
 </file>
 
 <file path=ppt/slides/slide6.xml><?xml version="1.0" encoding="utf-8"?>
-<p:sld xmlns:a="http://schemas.openxmlformats.org/drawingml/2006/main" xmlns:r="http://schemas.openxmlformats.org/officeDocument/2006/relationships" xmlns:p="http://schemas.openxmlformats.org/presentationml/2006/main">
+<p:sld xmlns:r="http://schemas.openxmlformats.org/officeDocument/2006/relationships" xmlns:c="http://schemas.openxmlformats.org/drawingml/2006/chart" xmlns:a="http://schemas.openxmlformats.org/drawingml/2006/main" xmlns:dgm="http://schemas.openxmlformats.org/drawingml/2006/diagram" xmlns:dsp="http://schemas.microsoft.com/office/drawing/2008/diagram" xmlns:p="http://schemas.openxmlformats.org/presentationml/2006/main">
   <p:cSld name="Slide 6">
     <p:bg>
-      <p:bgPr>
+      <p:bgPr shadeToTitle="0">
         <a:solidFill>
-          <a:srgbClr val="ECEAE3"/>
+          <a:srgbClr val="eceae3"/>
         </a:solidFill>
       </p:bgPr>
     </p:bg>
@@ -5085,45 +4936,6 @@
       </p:sp>
       <p:sp>
         <p:nvSpPr>
-          <p:cNvPr id="22" name="Text 20"/>
-          <p:cNvSpPr txBox="1"/>
-          <p:nvPr/>
-        </p:nvSpPr>
-        <p:spPr>
-          <a:xfrm>
-            <a:off x="812800" y="6223000"/>
-            <a:ext cx="8890000" cy="228600"/>
-          </a:xfrm>
-          <a:prstGeom prst="rect">
-            <a:avLst/>
-          </a:prstGeom>
-          <a:noFill/>
-          <a:ln/>
-        </p:spPr>
-        <p:txBody>
-          <a:bodyPr wrap="square" lIns="0" tIns="0" rIns="0" bIns="0" rtlCol="0" anchor="t"/>
-          <a:lstStyle/>
-          <a:p>
-            <a:pPr eaLnBrk="0" indent="0" marL="0">
-              <a:buNone/>
-            </a:pPr>
-            <a:r>
-              <a:rPr lang="ko-KR" altLang="en-US" sz="1200" dirty="0">
-                <a:solidFill>
-                  <a:srgbClr val="6A7180"/>
-                </a:solidFill>
-                <a:latin typeface="맑은 고딕" pitchFamily="34" charset="0"/>
-                <a:ea typeface="맑은 고딕" pitchFamily="34" charset="-127"/>
-                <a:cs typeface="맑은 고딕" pitchFamily="34" charset="-120"/>
-              </a:rPr>
-              <a:t>발표 이동건</a:t>
-            </a:r>
-            <a:endParaRPr lang="ko-KR" altLang="en-US" sz="1200" dirty="0"/>
-          </a:p>
-        </p:txBody>
-      </p:sp>
-      <p:sp>
-        <p:nvSpPr>
           <p:cNvPr id="23" name="Text 21"/>
           <p:cNvSpPr txBox="1"/>
           <p:nvPr/>
@@ -5170,12 +4982,12 @@
 </file>
 
 <file path=ppt/slides/slide7.xml><?xml version="1.0" encoding="utf-8"?>
-<p:sld xmlns:a="http://schemas.openxmlformats.org/drawingml/2006/main" xmlns:r="http://schemas.openxmlformats.org/officeDocument/2006/relationships" xmlns:p="http://schemas.openxmlformats.org/presentationml/2006/main">
+<p:sld xmlns:r="http://schemas.openxmlformats.org/officeDocument/2006/relationships" xmlns:c="http://schemas.openxmlformats.org/drawingml/2006/chart" xmlns:a="http://schemas.openxmlformats.org/drawingml/2006/main" xmlns:dgm="http://schemas.openxmlformats.org/drawingml/2006/diagram" xmlns:dsp="http://schemas.microsoft.com/office/drawing/2008/diagram" xmlns:p="http://schemas.openxmlformats.org/presentationml/2006/main">
   <p:cSld name="Slide 7">
     <p:bg>
-      <p:bgPr>
+      <p:bgPr shadeToTitle="0">
         <a:solidFill>
-          <a:srgbClr val="ECEAE3"/>
+          <a:srgbClr val="eceae3"/>
         </a:solidFill>
       </p:bgPr>
     </p:bg>
@@ -6685,45 +6497,6 @@
       </p:graphicFrame>
       <p:sp>
         <p:nvSpPr>
-          <p:cNvPr id="9" name="Text 6"/>
-          <p:cNvSpPr txBox="1"/>
-          <p:nvPr/>
-        </p:nvSpPr>
-        <p:spPr>
-          <a:xfrm>
-            <a:off x="812800" y="6223000"/>
-            <a:ext cx="8890000" cy="228600"/>
-          </a:xfrm>
-          <a:prstGeom prst="rect">
-            <a:avLst/>
-          </a:prstGeom>
-          <a:noFill/>
-          <a:ln/>
-        </p:spPr>
-        <p:txBody>
-          <a:bodyPr wrap="square" lIns="0" tIns="0" rIns="0" bIns="0" rtlCol="0" anchor="t"/>
-          <a:lstStyle/>
-          <a:p>
-            <a:pPr eaLnBrk="0" indent="0" marL="0">
-              <a:buNone/>
-            </a:pPr>
-            <a:r>
-              <a:rPr lang="ko-KR" altLang="en-US" sz="1200" dirty="0">
-                <a:solidFill>
-                  <a:srgbClr val="6A7180"/>
-                </a:solidFill>
-                <a:latin typeface="맑은 고딕" pitchFamily="34" charset="0"/>
-                <a:ea typeface="맑은 고딕" pitchFamily="34" charset="-127"/>
-                <a:cs typeface="맑은 고딕" pitchFamily="34" charset="-120"/>
-              </a:rPr>
-              <a:t>발표 이동건</a:t>
-            </a:r>
-            <a:endParaRPr lang="ko-KR" altLang="en-US" sz="1200" dirty="0"/>
-          </a:p>
-        </p:txBody>
-      </p:sp>
-      <p:sp>
-        <p:nvSpPr>
           <p:cNvPr id="10" name="Text 7"/>
           <p:cNvSpPr txBox="1"/>
           <p:nvPr/>
@@ -6770,12 +6543,12 @@
 </file>
 
 <file path=ppt/slides/slide8.xml><?xml version="1.0" encoding="utf-8"?>
-<p:sld xmlns:a="http://schemas.openxmlformats.org/drawingml/2006/main" xmlns:r="http://schemas.openxmlformats.org/officeDocument/2006/relationships" xmlns:p="http://schemas.openxmlformats.org/presentationml/2006/main">
+<p:sld xmlns:r="http://schemas.openxmlformats.org/officeDocument/2006/relationships" xmlns:c="http://schemas.openxmlformats.org/drawingml/2006/chart" xmlns:a="http://schemas.openxmlformats.org/drawingml/2006/main" xmlns:dgm="http://schemas.openxmlformats.org/drawingml/2006/diagram" xmlns:dsp="http://schemas.microsoft.com/office/drawing/2008/diagram" xmlns:p="http://schemas.openxmlformats.org/presentationml/2006/main">
   <p:cSld name="Slide 8">
     <p:bg>
-      <p:bgPr>
+      <p:bgPr shadeToTitle="0">
         <a:solidFill>
-          <a:srgbClr val="ECEAE3"/>
+          <a:srgbClr val="eceae3"/>
         </a:solidFill>
       </p:bgPr>
     </p:bg>
@@ -7285,45 +7058,6 @@
       </p:sp>
       <p:sp>
         <p:nvSpPr>
-          <p:cNvPr id="16" name="Text 14"/>
-          <p:cNvSpPr txBox="1"/>
-          <p:nvPr/>
-        </p:nvSpPr>
-        <p:spPr>
-          <a:xfrm>
-            <a:off x="812800" y="6223000"/>
-            <a:ext cx="8890000" cy="228600"/>
-          </a:xfrm>
-          <a:prstGeom prst="rect">
-            <a:avLst/>
-          </a:prstGeom>
-          <a:noFill/>
-          <a:ln/>
-        </p:spPr>
-        <p:txBody>
-          <a:bodyPr wrap="square" lIns="0" tIns="0" rIns="0" bIns="0" rtlCol="0" anchor="t"/>
-          <a:lstStyle/>
-          <a:p>
-            <a:pPr eaLnBrk="0" indent="0" marL="0">
-              <a:buNone/>
-            </a:pPr>
-            <a:r>
-              <a:rPr lang="ko-KR" altLang="en-US" sz="1200" dirty="0">
-                <a:solidFill>
-                  <a:srgbClr val="6A7180"/>
-                </a:solidFill>
-                <a:latin typeface="맑은 고딕" pitchFamily="34" charset="0"/>
-                <a:ea typeface="맑은 고딕" pitchFamily="34" charset="-127"/>
-                <a:cs typeface="맑은 고딕" pitchFamily="34" charset="-120"/>
-              </a:rPr>
-              <a:t>발표 이동건</a:t>
-            </a:r>
-            <a:endParaRPr lang="ko-KR" altLang="en-US" sz="1200" dirty="0"/>
-          </a:p>
-        </p:txBody>
-      </p:sp>
-      <p:sp>
-        <p:nvSpPr>
           <p:cNvPr id="17" name="Text 15"/>
           <p:cNvSpPr txBox="1"/>
           <p:nvPr/>
@@ -7370,12 +7104,12 @@
 </file>
 
 <file path=ppt/slides/slide9.xml><?xml version="1.0" encoding="utf-8"?>
-<p:sld xmlns:a="http://schemas.openxmlformats.org/drawingml/2006/main" xmlns:r="http://schemas.openxmlformats.org/officeDocument/2006/relationships" xmlns:p="http://schemas.openxmlformats.org/presentationml/2006/main">
+<p:sld xmlns:r="http://schemas.openxmlformats.org/officeDocument/2006/relationships" xmlns:c="http://schemas.openxmlformats.org/drawingml/2006/chart" xmlns:a="http://schemas.openxmlformats.org/drawingml/2006/main" xmlns:dgm="http://schemas.openxmlformats.org/drawingml/2006/diagram" xmlns:dsp="http://schemas.microsoft.com/office/drawing/2008/diagram" xmlns:p="http://schemas.openxmlformats.org/presentationml/2006/main">
   <p:cSld name="Slide 9">
     <p:bg>
-      <p:bgPr>
+      <p:bgPr shadeToTitle="0">
         <a:solidFill>
-          <a:srgbClr val="F7F6F2"/>
+          <a:srgbClr val="f7f6f2"/>
         </a:solidFill>
       </p:bgPr>
     </p:bg>
@@ -8037,45 +7771,6 @@
       </p:sp>
       <p:sp>
         <p:nvSpPr>
-          <p:cNvPr id="21" name="Text 19"/>
-          <p:cNvSpPr txBox="1"/>
-          <p:nvPr/>
-        </p:nvSpPr>
-        <p:spPr>
-          <a:xfrm>
-            <a:off x="812800" y="6223000"/>
-            <a:ext cx="8890000" cy="228600"/>
-          </a:xfrm>
-          <a:prstGeom prst="rect">
-            <a:avLst/>
-          </a:prstGeom>
-          <a:noFill/>
-          <a:ln/>
-        </p:spPr>
-        <p:txBody>
-          <a:bodyPr wrap="square" lIns="0" tIns="0" rIns="0" bIns="0" rtlCol="0" anchor="t"/>
-          <a:lstStyle/>
-          <a:p>
-            <a:pPr eaLnBrk="0" indent="0" marL="0">
-              <a:buNone/>
-            </a:pPr>
-            <a:r>
-              <a:rPr lang="ko-KR" altLang="en-US" sz="1200" dirty="0">
-                <a:solidFill>
-                  <a:srgbClr val="6A7180"/>
-                </a:solidFill>
-                <a:latin typeface="맑은 고딕" pitchFamily="34" charset="0"/>
-                <a:ea typeface="맑은 고딕" pitchFamily="34" charset="-127"/>
-                <a:cs typeface="맑은 고딕" pitchFamily="34" charset="-120"/>
-              </a:rPr>
-              <a:t>사진 수집과 라벨링은 공동 · 발표 이동건</a:t>
-            </a:r>
-            <a:endParaRPr lang="ko-KR" altLang="en-US" sz="1200" dirty="0"/>
-          </a:p>
-        </p:txBody>
-      </p:sp>
-      <p:sp>
-        <p:nvSpPr>
           <p:cNvPr id="22" name="Text 20"/>
           <p:cNvSpPr txBox="1"/>
           <p:nvPr/>
@@ -8122,44 +7817,44 @@
 </file>
 
 <file path=ppt/theme/theme1.xml><?xml version="1.0" encoding="utf-8"?>
-<a:theme xmlns:a="http://schemas.openxmlformats.org/drawingml/2006/main" name="Office Theme">
+<a:theme xmlns:r="http://schemas.openxmlformats.org/officeDocument/2006/relationships" xmlns:c="http://schemas.openxmlformats.org/drawingml/2006/chart" xmlns:dgm="http://schemas.openxmlformats.org/drawingml/2006/diagram" xmlns:dsp="http://schemas.microsoft.com/office/drawing/2008/diagram" xmlns:a="http://schemas.openxmlformats.org/drawingml/2006/main" xmlns:pic="http://schemas.openxmlformats.org/drawingml/2006/picture" xmlns:wp="http://schemas.openxmlformats.org/drawingml/2006/wordprocessingDrawing" xmlns:xdr="http://schemas.openxmlformats.org/drawingml/2006/spreadsheetDrawing" xmlns:lc="http://schemas.openxmlformats.org/drawingml/2006/lockedCanvas" xmlns:p="http://schemas.openxmlformats.org/presentationml/2006/main" name="Office Theme">
   <a:themeElements>
     <a:clrScheme name="Office">
       <a:dk1>
         <a:sysClr val="windowText" lastClr="000000"/>
       </a:dk1>
       <a:lt1>
-        <a:sysClr val="window" lastClr="FFFFFF"/>
+        <a:sysClr val="window" lastClr="ffffff"/>
       </a:lt1>
       <a:dk2>
-        <a:srgbClr val="44546A"/>
+        <a:srgbClr val="44546a"/>
       </a:dk2>
       <a:lt2>
-        <a:srgbClr val="E7E6E6"/>
+        <a:srgbClr val="e7e6e6"/>
       </a:lt2>
       <a:accent1>
-        <a:srgbClr val="4472C4"/>
+        <a:srgbClr val="4472c4"/>
       </a:accent1>
       <a:accent2>
-        <a:srgbClr val="ED7D31"/>
+        <a:srgbClr val="ed7d31"/>
       </a:accent2>
       <a:accent3>
-        <a:srgbClr val="A5A5A5"/>
+        <a:srgbClr val="a5a5a5"/>
       </a:accent3>
       <a:accent4>
-        <a:srgbClr val="FFC000"/>
+        <a:srgbClr val="ffc000"/>
       </a:accent4>
       <a:accent5>
-        <a:srgbClr val="5B9BD5"/>
+        <a:srgbClr val="5b9bd5"/>
       </a:accent5>
       <a:accent6>
-        <a:srgbClr val="70AD47"/>
+        <a:srgbClr val="70ad47"/>
       </a:accent6>
       <a:hlink>
-        <a:srgbClr val="0563C1"/>
+        <a:srgbClr val="0563c1"/>
       </a:hlink>
       <a:folHlink>
-        <a:srgbClr val="954F72"/>
+        <a:srgbClr val="954f72"/>
       </a:folHlink>
     </a:clrScheme>
     <a:fontScheme name="Office">
@@ -8167,7 +7862,7 @@
         <a:latin typeface="맑은 고딕"/>
         <a:ea typeface=""/>
         <a:cs typeface=""/>
-        <a:font script="Jpan" typeface="游ゴシック Light"/>
+        <a:font script="Jpan" typeface="Yu Gothic Light"/>
         <a:font script="Hang" typeface="맑은 고딕"/>
         <a:font script="Hans" typeface="等线 Light"/>
         <a:font script="Hant" typeface="新細明體"/>
@@ -8219,7 +7914,7 @@
         <a:latin typeface="맑은 고딕"/>
         <a:ea typeface=""/>
         <a:cs typeface=""/>
-        <a:font script="Jpan" typeface="游ゴシック"/>
+        <a:font script="Jpan" typeface="Yu Gothic"/>
         <a:font script="Hang" typeface="맑은 고딕"/>
         <a:font script="Hans" typeface="等线"/>
         <a:font script="Hant" typeface="新細明體"/>
@@ -8332,21 +8027,21 @@
             <a:schemeClr val="phClr"/>
           </a:solidFill>
           <a:prstDash val="solid"/>
-          <a:miter lim="800000"/>
+          <a:miter/>
         </a:ln>
         <a:ln w="12700" cap="flat" cmpd="sng" algn="ctr">
           <a:solidFill>
             <a:schemeClr val="phClr"/>
           </a:solidFill>
           <a:prstDash val="solid"/>
-          <a:miter lim="800000"/>
+          <a:miter/>
         </a:ln>
         <a:ln w="19050" cap="flat" cmpd="sng" algn="ctr">
           <a:solidFill>
             <a:schemeClr val="phClr"/>
           </a:solidFill>
           <a:prstDash val="solid"/>
-          <a:miter lim="800000"/>
+          <a:miter/>
         </a:ln>
       </a:lnStyleLst>
       <a:effectStyleLst>
@@ -8406,12 +8101,272 @@
       </a:bgFillStyleLst>
     </a:fmtScheme>
   </a:themeElements>
-  <a:objectDefaults/>
-  <a:extraClrSchemeLst/>
-  <a:extLst>
-    <a:ext uri="{05A4C25C-085E-4340-85A3-A5531E510DB2}">
-      <thm15:themeFamily xmlns:thm15="http://schemas.microsoft.com/office/thememl/2012/main" name="Office Theme" id="{62F939B6-93AF-4DB8-9C6B-D6C7DFDC589F}" vid="{4A3C46E8-61CC-4603-A589-7422A47A8E4A}"/>
-    </a:ext>
-  </a:extLst>
+</a:theme>
+</file>
+
+<file path=ppt/theme/theme2.xml><?xml version="1.0" encoding="utf-8"?>
+<a:theme xmlns:r="http://schemas.openxmlformats.org/officeDocument/2006/relationships" xmlns:c="http://schemas.openxmlformats.org/drawingml/2006/chart" xmlns:dgm="http://schemas.openxmlformats.org/drawingml/2006/diagram" xmlns:dsp="http://schemas.microsoft.com/office/drawing/2008/diagram" xmlns:a="http://schemas.openxmlformats.org/drawingml/2006/main" xmlns:pic="http://schemas.openxmlformats.org/drawingml/2006/picture" xmlns:wp="http://schemas.openxmlformats.org/drawingml/2006/wordprocessingDrawing" xmlns:xdr="http://schemas.openxmlformats.org/drawingml/2006/spreadsheetDrawing" xmlns:lc="http://schemas.openxmlformats.org/drawingml/2006/lockedCanvas" xmlns:p="http://schemas.openxmlformats.org/presentationml/2006/main" name="한컴오피스">
+  <a:themeElements>
+    <a:clrScheme name="한컴오피스">
+      <a:dk1>
+        <a:sysClr val="windowText" lastClr="000000"/>
+      </a:dk1>
+      <a:lt1>
+        <a:sysClr val="window" lastClr="ffffff"/>
+      </a:lt1>
+      <a:dk2>
+        <a:srgbClr val="3a3c84"/>
+      </a:dk2>
+      <a:lt2>
+        <a:srgbClr val="faf3db"/>
+      </a:lt2>
+      <a:accent1>
+        <a:srgbClr val="6182d6"/>
+      </a:accent1>
+      <a:accent2>
+        <a:srgbClr val="ff843a"/>
+      </a:accent2>
+      <a:accent3>
+        <a:srgbClr val="b2b2b2"/>
+      </a:accent3>
+      <a:accent4>
+        <a:srgbClr val="ffd700"/>
+      </a:accent4>
+      <a:accent5>
+        <a:srgbClr val="289b6e"/>
+      </a:accent5>
+      <a:accent6>
+        <a:srgbClr val="9d5cbb"/>
+      </a:accent6>
+      <a:hlink>
+        <a:srgbClr val="4a45ff"/>
+      </a:hlink>
+      <a:folHlink>
+        <a:srgbClr val="be27bb"/>
+      </a:folHlink>
+    </a:clrScheme>
+    <a:fontScheme name="한컴오피스">
+      <a:majorFont>
+        <a:latin typeface="Calibri"/>
+        <a:ea typeface=""/>
+        <a:cs typeface=""/>
+        <a:font script="Jpan" typeface="MS PGothic"/>
+        <a:font script="Hang" typeface="맑은 고딕"/>
+        <a:font script="Hans" typeface="SimSun"/>
+        <a:font script="Hant" typeface="新細明體"/>
+        <a:font script="Arab" typeface="Times New Roman"/>
+        <a:font script="Hebr" typeface="Times New Roman"/>
+        <a:font script="Thai" typeface="Angsana New"/>
+        <a:font script="Beng" typeface="Vrinda"/>
+        <a:font script="Gujr" typeface="Shruti"/>
+        <a:font script="Khmr" typeface="MoolBoran"/>
+        <a:font script="Knda" typeface="Tunga"/>
+        <a:font script="Guru" typeface="Raavi"/>
+        <a:font script="Cans" typeface="Euphemia"/>
+        <a:font script="Cher" typeface="Plantagenet Cherokee"/>
+        <a:font script="Yiii" typeface="Microsoft Yi Baiti"/>
+        <a:font script="Tibt" typeface="Microsoft Himalaya"/>
+        <a:font script="Thaa" typeface="MV Boli"/>
+        <a:font script="Deva" typeface="Mangal"/>
+        <a:font script="Telu" typeface="Gautami"/>
+        <a:font script="Taml" typeface="Latha"/>
+        <a:font script="Syrc" typeface="Estrangelo Edessa"/>
+        <a:font script="Orya" typeface="Kalinga"/>
+        <a:font script="Mlym" typeface="Kartika"/>
+        <a:font script="Laoo" typeface="DokChampa"/>
+        <a:font script="Sinh" typeface="Iskoola Pota"/>
+        <a:font script="Mong" typeface="Mongolian Baiti"/>
+        <a:font script="Viet" typeface="Times New Roman"/>
+        <a:font script="Uigh" typeface="Microsoft Uighur"/>
+        <a:font script="Ethi" typeface="Leelawadee UI"/>
+        <a:font script="Mymr" typeface="Myanmar Text"/>
+      </a:majorFont>
+      <a:minorFont>
+        <a:latin typeface="Calibri"/>
+        <a:ea typeface=""/>
+        <a:cs typeface=""/>
+        <a:font script="Jpan" typeface="MS PGothic"/>
+        <a:font script="Hang" typeface="맑은 고딕"/>
+        <a:font script="Hans" typeface="SimSun"/>
+        <a:font script="Hant" typeface="新細明體"/>
+        <a:font script="Arab" typeface="Times New Roman"/>
+        <a:font script="Hebr" typeface="Times New Roman"/>
+        <a:font script="Thai" typeface="Angsana New"/>
+        <a:font script="Beng" typeface="Vrinda"/>
+        <a:font script="Gujr" typeface="Shruti"/>
+        <a:font script="Khmr" typeface="MoolBoran"/>
+        <a:font script="Knda" typeface="Tunga"/>
+        <a:font script="Guru" typeface="Raavi"/>
+        <a:font script="Cans" typeface="Euphemia"/>
+        <a:font script="Cher" typeface="Plantagenet Cherokee"/>
+        <a:font script="Yiii" typeface="Microsoft Yi Baiti"/>
+        <a:font script="Tibt" typeface="Microsoft Himalaya"/>
+        <a:font script="Thaa" typeface="MV Boli"/>
+        <a:font script="Deva" typeface="Mangal"/>
+        <a:font script="Telu" typeface="Gautami"/>
+        <a:font script="Taml" typeface="Latha"/>
+        <a:font script="Syrc" typeface="Estrangelo Edessa"/>
+        <a:font script="Orya" typeface="Kalinga"/>
+        <a:font script="Mlym" typeface="Kartika"/>
+        <a:font script="Laoo" typeface="DokChampa"/>
+        <a:font script="Sinh" typeface="Iskoola Pota"/>
+        <a:font script="Mong" typeface="Mongolian Baiti"/>
+        <a:font script="Viet" typeface="Times New Roman"/>
+        <a:font script="Uigh" typeface="Microsoft Uighur"/>
+        <a:font script="Ethi" typeface="Leelawadee UI"/>
+        <a:font script="Mymr" typeface="Myanmar Text"/>
+      </a:minorFont>
+    </a:fontScheme>
+    <a:fmtScheme name="한컴오피스">
+      <a:fillStyleLst>
+        <a:solidFill>
+          <a:schemeClr val="phClr"/>
+        </a:solidFill>
+        <a:gradFill rotWithShape="1">
+          <a:gsLst>
+            <a:gs pos="0">
+              <a:schemeClr val="phClr">
+                <a:tint val="50000"/>
+                <a:satMod val="300000"/>
+              </a:schemeClr>
+            </a:gs>
+            <a:gs pos="35000">
+              <a:schemeClr val="phClr">
+                <a:tint val="37000"/>
+                <a:satMod val="300000"/>
+              </a:schemeClr>
+            </a:gs>
+            <a:gs pos="100000">
+              <a:schemeClr val="phClr">
+                <a:tint val="15000"/>
+                <a:satMod val="350000"/>
+              </a:schemeClr>
+            </a:gs>
+          </a:gsLst>
+          <a:lin ang="16200000" scaled="1"/>
+        </a:gradFill>
+        <a:gradFill rotWithShape="1">
+          <a:gsLst>
+            <a:gs pos="0">
+              <a:schemeClr val="phClr">
+                <a:shade val="51000"/>
+                <a:satMod val="130000"/>
+              </a:schemeClr>
+            </a:gs>
+            <a:gs pos="80000">
+              <a:schemeClr val="phClr">
+                <a:shade val="93000"/>
+                <a:satMod val="130000"/>
+              </a:schemeClr>
+            </a:gs>
+            <a:gs pos="100000">
+              <a:schemeClr val="phClr">
+                <a:shade val="94000"/>
+                <a:satMod val="135000"/>
+              </a:schemeClr>
+            </a:gs>
+          </a:gsLst>
+          <a:lin ang="16200000" scaled="0"/>
+        </a:gradFill>
+      </a:fillStyleLst>
+      <a:lnStyleLst>
+        <a:ln w="12700" cap="flat" cmpd="sng" algn="ctr">
+          <a:solidFill>
+            <a:schemeClr val="phClr">
+              <a:satMod val="105000"/>
+            </a:schemeClr>
+          </a:solidFill>
+          <a:prstDash val="solid"/>
+        </a:ln>
+        <a:ln w="19050" cap="flat" cmpd="sng" algn="ctr">
+          <a:solidFill>
+            <a:schemeClr val="phClr"/>
+          </a:solidFill>
+          <a:prstDash val="solid"/>
+        </a:ln>
+        <a:ln w="38100" cap="flat" cmpd="sng" algn="ctr">
+          <a:solidFill>
+            <a:schemeClr val="phClr"/>
+          </a:solidFill>
+          <a:prstDash val="solid"/>
+        </a:ln>
+      </a:lnStyleLst>
+      <a:effectStyleLst>
+        <a:effectStyle>
+          <a:effectLst>
+            <a:outerShdw blurRad="38100" dist="25400" dir="5400000" rotWithShape="0">
+              <a:srgbClr val="000000">
+                <a:alpha val="75000"/>
+              </a:srgbClr>
+            </a:outerShdw>
+          </a:effectLst>
+        </a:effectStyle>
+        <a:effectStyle>
+          <a:effectLst>
+            <a:outerShdw blurRad="38100" dist="25400" dir="5400000" rotWithShape="0">
+              <a:srgbClr val="000000">
+                <a:alpha val="75000"/>
+              </a:srgbClr>
+            </a:outerShdw>
+          </a:effectLst>
+        </a:effectStyle>
+        <a:effectStyle>
+          <a:effectLst>
+            <a:reflection blurRad="12700" stA="26000" endPos="28000" dist="38100" dir="5400000" sy="-100000" rotWithShape="0"/>
+          </a:effectLst>
+        </a:effectStyle>
+      </a:effectStyleLst>
+      <a:bgFillStyleLst>
+        <a:solidFill>
+          <a:schemeClr val="phClr"/>
+        </a:solidFill>
+        <a:gradFill rotWithShape="1">
+          <a:gsLst>
+            <a:gs pos="0">
+              <a:schemeClr val="phClr">
+                <a:tint val="40000"/>
+                <a:satMod val="350000"/>
+              </a:schemeClr>
+            </a:gs>
+            <a:gs pos="40000">
+              <a:schemeClr val="phClr">
+                <a:tint val="45000"/>
+                <a:shade val="99000"/>
+                <a:satMod val="350000"/>
+              </a:schemeClr>
+            </a:gs>
+            <a:gs pos="100000">
+              <a:schemeClr val="phClr">
+                <a:shade val="20000"/>
+                <a:satMod val="255000"/>
+              </a:schemeClr>
+            </a:gs>
+          </a:gsLst>
+          <a:path path="circle">
+            <a:fillToRect l="50000" t="-80000" r="50000" b="180000"/>
+          </a:path>
+        </a:gradFill>
+        <a:gradFill rotWithShape="1">
+          <a:gsLst>
+            <a:gs pos="0">
+              <a:schemeClr val="phClr">
+                <a:tint val="80000"/>
+                <a:satMod val="300000"/>
+              </a:schemeClr>
+            </a:gs>
+            <a:gs pos="100000">
+              <a:schemeClr val="phClr">
+                <a:shade val="30000"/>
+                <a:satMod val="200000"/>
+              </a:schemeClr>
+            </a:gs>
+          </a:gsLst>
+          <a:path path="circle">
+            <a:fillToRect l="50000" t="50000" r="50000" b="50000"/>
+          </a:path>
+        </a:gradFill>
+      </a:bgFillStyleLst>
+    </a:fmtScheme>
+  </a:themeElements>
 </a:theme>
 </file>
--- a/자료/발표자료-KIOSSON.pptx
+++ b/자료/발표자료-KIOSSON.pptx
@@ -7250,24 +7250,54 @@
           <a:ln/>
         </p:spPr>
         <p:txBody>
-          <a:bodyPr wrap="square" lIns="0" tIns="0" rIns="0" bIns="0" rtlCol="0" anchor="t"/>
-          <a:lstStyle/>
-          <a:p>
-            <a:pPr eaLnBrk="0" indent="0" marL="0">
-              <a:buNone/>
-            </a:pPr>
-            <a:r>
-              <a:rPr lang="ko-KR" altLang="en-US" sz="1500" b="1" dirty="0">
-                <a:solidFill>
-                  <a:srgbClr val="2B5FD9"/>
-                </a:solidFill>
-                <a:latin typeface="맑은 고딕" pitchFamily="34" charset="0"/>
-                <a:ea typeface="맑은 고딕" pitchFamily="34" charset="-127"/>
-                <a:cs typeface="맑은 고딕" pitchFamily="34" charset="-120"/>
-              </a:rPr>
-              <a:t>Sprint 1 · 8주</a:t>
-            </a:r>
-            <a:endParaRPr lang="ko-KR" altLang="en-US" sz="1500" dirty="0"/>
+          <a:bodyPr wrap="square" lIns="0" tIns="0" rIns="0" bIns="0" anchor="t"/>
+          <a:lstStyle/>
+          <a:p>
+            <a:pPr marL="0" lvl="0" indent="0" eaLnBrk="0">
+              <a:buNone/>
+              <a:defRPr/>
+            </a:pPr>
+            <a:r>
+              <a:rPr lang="ko-KR" altLang="en-US" sz="1500" b="1">
+                <a:solidFill>
+                  <a:srgbClr val="2b5fd9"/>
+                </a:solidFill>
+                <a:latin typeface="맑은 고딕"/>
+                <a:ea typeface="맑은 고딕"/>
+                <a:cs typeface="맑은 고딕"/>
+              </a:rPr>
+              <a:t>Sprint 1 · </a:t>
+            </a:r>
+            <a:r>
+              <a:rPr lang="en-US" altLang="ko-KR" sz="1500" b="1">
+                <a:solidFill>
+                  <a:srgbClr val="2b5fd9"/>
+                </a:solidFill>
+                <a:latin typeface="맑은 고딕"/>
+                <a:ea typeface="맑은 고딕"/>
+                <a:cs typeface="맑은 고딕"/>
+              </a:rPr>
+              <a:t>9</a:t>
+            </a:r>
+            <a:r>
+              <a:rPr lang="ko-KR" altLang="en-US" sz="1500" b="1">
+                <a:solidFill>
+                  <a:srgbClr val="2b5fd9"/>
+                </a:solidFill>
+                <a:latin typeface="맑은 고딕"/>
+                <a:ea typeface="맑은 고딕"/>
+                <a:cs typeface="맑은 고딕"/>
+              </a:rPr>
+              <a:t>주</a:t>
+            </a:r>
+            <a:endParaRPr lang="ko-KR" altLang="en-US" sz="1500" b="1">
+              <a:solidFill>
+                <a:srgbClr val="2b5fd9"/>
+              </a:solidFill>
+              <a:latin typeface="맑은 고딕"/>
+              <a:ea typeface="맑은 고딕"/>
+              <a:cs typeface="맑은 고딕"/>
+            </a:endParaRPr>
           </a:p>
         </p:txBody>
       </p:sp>

--- a/자료/발표자료-KIOSSON.pptx
+++ b/자료/발표자료-KIOSSON.pptx
@@ -1,24 +1,24 @@
 
 <file path=ppt/presentation.xml><?xml version="1.0" encoding="utf-8"?>
-<p:presentation xmlns:r="http://schemas.openxmlformats.org/officeDocument/2006/relationships" xmlns:c="http://schemas.openxmlformats.org/drawingml/2006/chart" xmlns:a="http://schemas.openxmlformats.org/drawingml/2006/main" xmlns:dgm="http://schemas.openxmlformats.org/drawingml/2006/diagram" xmlns:dsp="http://schemas.microsoft.com/office/drawing/2008/diagram" xmlns:p="http://schemas.openxmlformats.org/presentationml/2006/main" autoCompressPictures="0">
+<p:presentation xmlns:a="http://schemas.openxmlformats.org/drawingml/2006/main" xmlns:r="http://schemas.openxmlformats.org/officeDocument/2006/relationships" xmlns:p="http://schemas.openxmlformats.org/presentationml/2006/main" saveSubsetFonts="1" autoCompressPictures="0">
   <p:sldMasterIdLst>
     <p:sldMasterId id="2147483648" r:id="rId1"/>
   </p:sldMasterIdLst>
+  <p:sldIdLst>
+    <p:sldId id="256" r:id="rId2"/>
+    <p:sldId id="257" r:id="rId3"/>
+    <p:sldId id="258" r:id="rId4"/>
+    <p:sldId id="259" r:id="rId5"/>
+    <p:sldId id="260" r:id="rId6"/>
+    <p:sldId id="261" r:id="rId7"/>
+    <p:sldId id="262" r:id="rId8"/>
+    <p:sldId id="263" r:id="rId9"/>
+    <p:sldId id="264" r:id="rId10"/>
+    <p:sldId id="265" r:id="rId11"/>
+  </p:sldIdLst>
   <p:notesMasterIdLst>
-    <p:notesMasterId r:id="rId2"/>
+    <p:notesMasterId r:id="rId12"/>
   </p:notesMasterIdLst>
-  <p:sldIdLst>
-    <p:sldId id="256" r:id="rId3"/>
-    <p:sldId id="257" r:id="rId4"/>
-    <p:sldId id="258" r:id="rId5"/>
-    <p:sldId id="259" r:id="rId6"/>
-    <p:sldId id="260" r:id="rId7"/>
-    <p:sldId id="261" r:id="rId8"/>
-    <p:sldId id="262" r:id="rId9"/>
-    <p:sldId id="263" r:id="rId10"/>
-    <p:sldId id="264" r:id="rId11"/>
-    <p:sldId id="265" r:id="rId12"/>
-  </p:sldIdLst>
   <p:sldSz cx="12192000" cy="6858000"/>
   <p:notesSz cx="6858000" cy="12192000"/>
   <p:defaultTextStyle>
@@ -117,7 +117,7 @@
 </file>
 
 <file path=ppt/notesMasters/notesMaster1.xml><?xml version="1.0" encoding="utf-8"?>
-<p:notesMaster xmlns:r="http://schemas.openxmlformats.org/officeDocument/2006/relationships" xmlns:c="http://schemas.openxmlformats.org/drawingml/2006/chart" xmlns:a="http://schemas.openxmlformats.org/drawingml/2006/main" xmlns:dgm="http://schemas.openxmlformats.org/drawingml/2006/diagram" xmlns:dsp="http://schemas.microsoft.com/office/drawing/2008/diagram" xmlns:p="http://schemas.openxmlformats.org/presentationml/2006/main">
+<p:notesMaster xmlns:a="http://schemas.openxmlformats.org/drawingml/2006/main" xmlns:r="http://schemas.openxmlformats.org/officeDocument/2006/relationships" xmlns:p="http://schemas.openxmlformats.org/presentationml/2006/main">
   <p:cSld>
     <p:bg>
       <p:bgRef idx="1001">
@@ -145,7 +145,7 @@
             <a:spLocks noGrp="1"/>
           </p:cNvSpPr>
           <p:nvPr>
-            <p:ph type="hdr" sz="quarter" idx="0"/>
+            <p:ph type="hdr" sz="quarter"/>
           </p:nvPr>
         </p:nvSpPr>
         <p:spPr>
@@ -165,7 +165,6 @@
             </a:lvl1pPr>
           </a:lstStyle>
           <a:p>
-            <a:pPr lvl="0"/>
             <a:endParaRPr lang="en-US"/>
           </a:p>
         </p:txBody>
@@ -197,8 +196,7 @@
             </a:lvl1pPr>
           </a:lstStyle>
           <a:p>
-            <a:pPr lvl="0"/>
-            <a:fld id="{5282F153-3F37-0F45-9E97-73ACFA13230C}" type="datetime1">
+            <a:fld id="{5282F153-3F37-0F45-9E97-73ACFA13230C}" type="datetimeFigureOut">
               <a:rPr lang="en-US"/>
               <a:t>7/23/19</a:t>
             </a:fld>
@@ -210,7 +208,7 @@
         <p:nvSpPr>
           <p:cNvPr id="4" name="Slide Image Placeholder 3"/>
           <p:cNvSpPr>
-            <a:spLocks noGrp="1" noRot="1" noChangeAspect="1" noTextEdit="1"/>
+            <a:spLocks noGrp="1" noRot="1" noChangeAspect="1"/>
           </p:cNvSpPr>
           <p:nvPr>
             <p:ph type="sldImg" idx="2"/>
@@ -235,7 +233,6 @@
           <a:bodyPr vert="horz" lIns="91440" tIns="45720" rIns="91440" bIns="45720" rtlCol="0" anchor="ctr"/>
           <a:lstStyle/>
           <a:p>
-            <a:pPr lvl="0"/>
             <a:endParaRPr lang="en-US"/>
           </a:p>
         </p:txBody>
@@ -326,7 +323,6 @@
             </a:lvl1pPr>
           </a:lstStyle>
           <a:p>
-            <a:pPr lvl="0"/>
             <a:endParaRPr lang="en-US"/>
           </a:p>
         </p:txBody>
@@ -358,7 +354,6 @@
             </a:lvl1pPr>
           </a:lstStyle>
           <a:p>
-            <a:pPr lvl="0"/>
             <a:fld id="{CE5E9CC1-C706-0F49-92D6-E571CC5EEA8F}" type="slidenum">
               <a:rPr lang="en-US"/>
               <a:t>‹#›</a:t>
@@ -375,7 +370,6 @@
     </p:extLst>
   </p:cSld>
   <p:clrMap bg1="lt1" tx1="dk1" bg2="lt2" tx2="dk2" accent1="accent1" accent2="accent2" accent3="accent3" accent4="accent4" accent5="accent5" accent6="accent6" hlink="hlink" folHlink="folHlink"/>
-  <p:hf hdr="0" ftr="0" dt="0"/>
   <p:notesStyle>
     <a:lvl1pPr marL="0" algn="l" defTabSz="914400" rtl="0" eaLnBrk="1" latinLnBrk="0" hangingPunct="1">
       <a:defRPr sz="1200" kern="1200">
@@ -1142,7 +1136,7 @@
             <a:r>
               <a:rPr lang="en-US" dirty="0"/>
               <a:t>[이동건 · 약 35초]
-성능은 저희가 직접 만든 데이터로 측정합니다. 학교 주변 매장 10곳 이상에서 키오스크 화면 200장 이상을 찍고, 사진마다 정답 버튼을 표시합니다. 목표는 버튼 안내 정확도 70% 이상, 위치 정확도 60% 이상, 화면이 바뀐 뒤 새 안내까지 5초 이내입니다. 또 55세 이상 참가자 다섯 명 이상과 실제 매장에서 주문 완료율을 잽니다. 모델 크기와 상용 API도 같은 데이터로 비교해서, 어떤 방식이 가장 나은지 수치로 보여 드리겠습니다.</a:t>
+성능은 저희가 직접 만든 데이터로 측정합니다. 학교 주변 매장 10곳 이상에서 키오스크 화면 200장 이상을 찍고, 실제 사용과 비슷하도록 짧은 영상에서 고른 장면도 함께 넣어 정답 버튼을 표시합니다. 목표는 버튼 안내 정확도 70% 이상, 위치 정확도 60% 이상, 화면이 바뀐 뒤 새 안내까지 5초 이내입니다. 또 55세 이상 참가자 다섯 명 이상과 실제 매장에서 주문 완료율을 잽니다. 모델 크기와 상용 API도 같은 데이터로 비교해서, 어떤 방식이 가장 나은지 수치로 보여 드리겠습니다.</a:t>
             </a:r>
             <a:endParaRPr lang="en-US" dirty="0"/>
           </a:p>
@@ -1320,7 +1314,7 @@
             <a:r>
               <a:rPr lang="en-US" dirty="0"/>
               <a:t>[이동건 · 약 35초]
-일정은 세 번의 스프린트 평가에 맞췄습니다. 8주차에는 사진을 올리면 눌러야 할 버튼을 글로 안내하는 첫 버전을 배포합니다. 12주차에는 찍기 버튼 없이 카메라를 비추기만 하면, 실시간 화면의 버튼 표시와 음성 안내를 받으며 주문을 끝까지 하는 버전을 만듭니다. 15주차에는 고령자 사용성 테스트와 개선 전후 성능 비교까지 마칩니다. 저는 AI 서버와 평가를, 정윤서 팀장은 웹 화면과 배포, 사용성 테스트를 맡고, 사진 수집과 라벨링은 함께 합니다.</a:t>
+일정은 9주부터 15주까지입니다. 9주에서 10주에는 사진을 올리면 눌러야 할 버튼을 글로 안내하는 첫 버전을 배포합니다. 12주 Sprint 2 평가까지는 찍기 버튼 없이 카메라를 비추기만 하면, 실시간 화면의 버튼 표시와 음성 안내를 받으며 주문을 끝까지 하는 버전을 만듭니다. 15주 Sprint 3 평가까지는 고령자 사용성 테스트와 개선 전후 성능 비교까지 마칩니다. 저는 AI 서버와 평가를, 정윤서 팀장은 웹 화면과 배포, 사용성 테스트를 맡고, 사진 수집과 라벨링은 함께 합니다.</a:t>
             </a:r>
             <a:endParaRPr lang="en-US" dirty="0"/>
           </a:p>
@@ -2242,12 +2236,12 @@
 </file>
 
 <file path=ppt/slides/slide2.xml><?xml version="1.0" encoding="utf-8"?>
-<p:sld xmlns:r="http://schemas.openxmlformats.org/officeDocument/2006/relationships" xmlns:c="http://schemas.openxmlformats.org/drawingml/2006/chart" xmlns:a="http://schemas.openxmlformats.org/drawingml/2006/main" xmlns:dgm="http://schemas.openxmlformats.org/drawingml/2006/diagram" xmlns:dsp="http://schemas.microsoft.com/office/drawing/2008/diagram" xmlns:p="http://schemas.openxmlformats.org/presentationml/2006/main">
+<p:sld xmlns:a="http://schemas.openxmlformats.org/drawingml/2006/main" xmlns:r="http://schemas.openxmlformats.org/officeDocument/2006/relationships" xmlns:p="http://schemas.openxmlformats.org/presentationml/2006/main">
   <p:cSld name="Slide 2">
     <p:bg>
-      <p:bgPr shadeToTitle="0">
+      <p:bgPr>
         <a:solidFill>
-          <a:srgbClr val="f7f6f2"/>
+          <a:srgbClr val="F7F6F2"/>
         </a:solidFill>
       </p:bgPr>
     </p:bg>
@@ -2745,25 +2739,24 @@
           <a:ln/>
         </p:spPr>
         <p:txBody>
-          <a:bodyPr wrap="square" lIns="0" tIns="0" rIns="0" bIns="0" anchor="t"/>
-          <a:lstStyle/>
-          <a:p>
-            <a:pPr marL="0" lvl="0" indent="0" eaLnBrk="0">
-              <a:buNone/>
-              <a:defRPr/>
-            </a:pPr>
-            <a:r>
-              <a:rPr lang="ko-KR" altLang="en-US" sz="1200">
-                <a:solidFill>
-                  <a:srgbClr val="6a7180"/>
-                </a:solidFill>
-                <a:latin typeface="맑은 고딕"/>
-                <a:ea typeface="맑은 고딕"/>
-                <a:cs typeface="맑은 고딕"/>
-              </a:rPr>
-              <a:t>출처: 과학기술정보통신부(이투데이), 서울디지털재단 2023, 보건복지부 2024 ·</a:t>
-            </a:r>
-            <a:endParaRPr lang="ko-KR" altLang="en-US" sz="1200"/>
+          <a:bodyPr wrap="square" lIns="0" tIns="0" rIns="0" bIns="0" rtlCol="0" anchor="t"/>
+          <a:lstStyle/>
+          <a:p>
+            <a:pPr eaLnBrk="0" indent="0" marL="0">
+              <a:buNone/>
+            </a:pPr>
+            <a:r>
+              <a:rPr lang="ko-KR" altLang="en-US" sz="1200" dirty="0">
+                <a:solidFill>
+                  <a:srgbClr val="6A7180"/>
+                </a:solidFill>
+                <a:latin typeface="맑은 고딕" pitchFamily="34" charset="0"/>
+                <a:ea typeface="맑은 고딕" pitchFamily="34" charset="-127"/>
+                <a:cs typeface="맑은 고딕" pitchFamily="34" charset="-120"/>
+              </a:rPr>
+              <a:t>출처: 과학기술정보통신부(이투데이), 서울디지털재단 2023, 보건복지부 2024 · 발표 정윤서</a:t>
+            </a:r>
+            <a:endParaRPr lang="ko-KR" altLang="en-US" sz="1200" dirty="0"/>
           </a:p>
         </p:txBody>
       </p:sp>
@@ -2815,12 +2808,12 @@
 </file>
 
 <file path=ppt/slides/slide3.xml><?xml version="1.0" encoding="utf-8"?>
-<p:sld xmlns:r="http://schemas.openxmlformats.org/officeDocument/2006/relationships" xmlns:c="http://schemas.openxmlformats.org/drawingml/2006/chart" xmlns:a="http://schemas.openxmlformats.org/drawingml/2006/main" xmlns:dgm="http://schemas.openxmlformats.org/drawingml/2006/diagram" xmlns:dsp="http://schemas.microsoft.com/office/drawing/2008/diagram" xmlns:p="http://schemas.openxmlformats.org/presentationml/2006/main">
+<p:sld xmlns:a="http://schemas.openxmlformats.org/drawingml/2006/main" xmlns:r="http://schemas.openxmlformats.org/officeDocument/2006/relationships" xmlns:p="http://schemas.openxmlformats.org/presentationml/2006/main">
   <p:cSld name="Slide 3">
     <p:bg>
-      <p:bgPr shadeToTitle="0">
+      <p:bgPr>
         <a:solidFill>
-          <a:srgbClr val="f7f6f2"/>
+          <a:srgbClr val="F7F6F2"/>
         </a:solidFill>
       </p:bgPr>
     </p:bg>
@@ -3375,6 +3368,45 @@
       </p:sp>
       <p:sp>
         <p:nvSpPr>
+          <p:cNvPr id="17" name="Text 15"/>
+          <p:cNvSpPr txBox="1"/>
+          <p:nvPr/>
+        </p:nvSpPr>
+        <p:spPr>
+          <a:xfrm>
+            <a:off x="812800" y="6223000"/>
+            <a:ext cx="8890000" cy="228600"/>
+          </a:xfrm>
+          <a:prstGeom prst="rect">
+            <a:avLst/>
+          </a:prstGeom>
+          <a:noFill/>
+          <a:ln/>
+        </p:spPr>
+        <p:txBody>
+          <a:bodyPr wrap="square" lIns="0" tIns="0" rIns="0" bIns="0" rtlCol="0" anchor="t"/>
+          <a:lstStyle/>
+          <a:p>
+            <a:pPr eaLnBrk="0" indent="0" marL="0">
+              <a:buNone/>
+            </a:pPr>
+            <a:r>
+              <a:rPr lang="ko-KR" altLang="en-US" sz="1200" dirty="0">
+                <a:solidFill>
+                  <a:srgbClr val="6A7180"/>
+                </a:solidFill>
+                <a:latin typeface="맑은 고딕" pitchFamily="34" charset="0"/>
+                <a:ea typeface="맑은 고딕" pitchFamily="34" charset="-127"/>
+                <a:cs typeface="맑은 고딕" pitchFamily="34" charset="-120"/>
+              </a:rPr>
+              <a:t>발표 정윤서</a:t>
+            </a:r>
+            <a:endParaRPr lang="ko-KR" altLang="en-US" sz="1200" dirty="0"/>
+          </a:p>
+        </p:txBody>
+      </p:sp>
+      <p:sp>
+        <p:nvSpPr>
           <p:cNvPr id="18" name="Text 16"/>
           <p:cNvSpPr txBox="1"/>
           <p:nvPr/>
@@ -3421,12 +3453,12 @@
 </file>
 
 <file path=ppt/slides/slide4.xml><?xml version="1.0" encoding="utf-8"?>
-<p:sld xmlns:r="http://schemas.openxmlformats.org/officeDocument/2006/relationships" xmlns:c="http://schemas.openxmlformats.org/drawingml/2006/chart" xmlns:a="http://schemas.openxmlformats.org/drawingml/2006/main" xmlns:dgm="http://schemas.openxmlformats.org/drawingml/2006/diagram" xmlns:dsp="http://schemas.microsoft.com/office/drawing/2008/diagram" xmlns:p="http://schemas.openxmlformats.org/presentationml/2006/main">
+<p:sld xmlns:a="http://schemas.openxmlformats.org/drawingml/2006/main" xmlns:r="http://schemas.openxmlformats.org/officeDocument/2006/relationships" xmlns:p="http://schemas.openxmlformats.org/presentationml/2006/main">
   <p:cSld name="Slide 4">
     <p:bg>
-      <p:bgPr shadeToTitle="0">
+      <p:bgPr>
         <a:solidFill>
-          <a:srgbClr val="f7f6f2"/>
+          <a:srgbClr val="F7F6F2"/>
         </a:solidFill>
       </p:bgPr>
     </p:bg>
@@ -3553,7 +3585,7 @@
           <p:nvPr/>
         </p:nvPicPr>
         <p:blipFill>
-          <a:blip r:embed="rId3"/>
+          <a:blip r:embed="rId1"/>
           <a:stretch>
             <a:fillRect/>
           </a:stretch>
@@ -3599,7 +3631,7 @@
           <p:nvPr/>
         </p:nvPicPr>
         <p:blipFill>
-          <a:blip r:embed="rId4"/>
+          <a:blip r:embed="rId2"/>
           <a:stretch>
             <a:fillRect/>
           </a:stretch>
@@ -3847,6 +3879,84 @@
               <a:t>누르면 바뀐 화면을 자동 인식, 완료까지</a:t>
             </a:r>
             <a:endParaRPr lang="ko-KR" altLang="en-US" sz="1500" dirty="0"/>
+          </a:p>
+        </p:txBody>
+      </p:sp>
+      <p:sp>
+        <p:nvSpPr>
+          <p:cNvPr id="12" name="Text 8"/>
+          <p:cNvSpPr txBox="1"/>
+          <p:nvPr/>
+        </p:nvSpPr>
+        <p:spPr>
+          <a:xfrm>
+            <a:off x="8483600" y="5207000"/>
+            <a:ext cx="2895600" cy="317500"/>
+          </a:xfrm>
+          <a:prstGeom prst="rect">
+            <a:avLst/>
+          </a:prstGeom>
+          <a:noFill/>
+          <a:ln/>
+        </p:spPr>
+        <p:txBody>
+          <a:bodyPr wrap="square" lIns="0" tIns="0" rIns="0" bIns="0" rtlCol="0" anchor="t"/>
+          <a:lstStyle/>
+          <a:p>
+            <a:pPr eaLnBrk="0" indent="0" marL="0">
+              <a:buNone/>
+            </a:pPr>
+            <a:r>
+              <a:rPr lang="ko-KR" altLang="en-US" sz="1300" dirty="0">
+                <a:solidFill>
+                  <a:srgbClr val="6A7180"/>
+                </a:solidFill>
+                <a:latin typeface="맑은 고딕" pitchFamily="34" charset="0"/>
+                <a:ea typeface="맑은 고딕" pitchFamily="34" charset="-127"/>
+                <a:cs typeface="맑은 고딕" pitchFamily="34" charset="-120"/>
+              </a:rPr>
+              <a:t>앱 설치 없이 링크로 여는 모바일 웹</a:t>
+            </a:r>
+            <a:endParaRPr lang="ko-KR" altLang="en-US" sz="1300" dirty="0"/>
+          </a:p>
+        </p:txBody>
+      </p:sp>
+      <p:sp>
+        <p:nvSpPr>
+          <p:cNvPr id="13" name="Text 9"/>
+          <p:cNvSpPr txBox="1"/>
+          <p:nvPr/>
+        </p:nvSpPr>
+        <p:spPr>
+          <a:xfrm>
+            <a:off x="812800" y="6223000"/>
+            <a:ext cx="8890000" cy="228600"/>
+          </a:xfrm>
+          <a:prstGeom prst="rect">
+            <a:avLst/>
+          </a:prstGeom>
+          <a:noFill/>
+          <a:ln/>
+        </p:spPr>
+        <p:txBody>
+          <a:bodyPr wrap="square" lIns="0" tIns="0" rIns="0" bIns="0" rtlCol="0" anchor="t"/>
+          <a:lstStyle/>
+          <a:p>
+            <a:pPr eaLnBrk="0" indent="0" marL="0">
+              <a:buNone/>
+            </a:pPr>
+            <a:r>
+              <a:rPr lang="ko-KR" altLang="en-US" sz="1200" dirty="0">
+                <a:solidFill>
+                  <a:srgbClr val="6A7180"/>
+                </a:solidFill>
+                <a:latin typeface="맑은 고딕" pitchFamily="34" charset="0"/>
+                <a:ea typeface="맑은 고딕" pitchFamily="34" charset="-127"/>
+                <a:cs typeface="맑은 고딕" pitchFamily="34" charset="-120"/>
+              </a:rPr>
+              <a:t>발표 정윤서</a:t>
+            </a:r>
+            <a:endParaRPr lang="ko-KR" altLang="en-US" sz="1200" dirty="0"/>
           </a:p>
         </p:txBody>
       </p:sp>
@@ -3898,12 +4008,12 @@
 </file>
 
 <file path=ppt/slides/slide5.xml><?xml version="1.0" encoding="utf-8"?>
-<p:sld xmlns:r="http://schemas.openxmlformats.org/officeDocument/2006/relationships" xmlns:c="http://schemas.openxmlformats.org/drawingml/2006/chart" xmlns:a="http://schemas.openxmlformats.org/drawingml/2006/main" xmlns:dgm="http://schemas.openxmlformats.org/drawingml/2006/diagram" xmlns:dsp="http://schemas.microsoft.com/office/drawing/2008/diagram" xmlns:p="http://schemas.openxmlformats.org/presentationml/2006/main">
+<p:sld xmlns:a="http://schemas.openxmlformats.org/drawingml/2006/main" xmlns:r="http://schemas.openxmlformats.org/officeDocument/2006/relationships" xmlns:p="http://schemas.openxmlformats.org/presentationml/2006/main">
   <p:cSld name="Slide 5">
     <p:bg>
-      <p:bgPr shadeToTitle="0">
+      <p:bgPr>
         <a:solidFill>
-          <a:srgbClr val="eceae3"/>
+          <a:srgbClr val="ECEAE3"/>
         </a:solidFill>
       </p:bgPr>
     </p:bg>
@@ -4030,7 +4140,7 @@
           <p:nvPr/>
         </p:nvPicPr>
         <p:blipFill>
-          <a:blip r:embed="rId3"/>
+          <a:blip r:embed="rId1"/>
           <a:stretch>
             <a:fillRect/>
           </a:stretch>
@@ -4045,6 +4155,45 @@
           </a:prstGeom>
         </p:spPr>
       </p:pic>
+      <p:sp>
+        <p:nvSpPr>
+          <p:cNvPr id="6" name="Text 3"/>
+          <p:cNvSpPr txBox="1"/>
+          <p:nvPr/>
+        </p:nvSpPr>
+        <p:spPr>
+          <a:xfrm>
+            <a:off x="812800" y="6223000"/>
+            <a:ext cx="8890000" cy="228600"/>
+          </a:xfrm>
+          <a:prstGeom prst="rect">
+            <a:avLst/>
+          </a:prstGeom>
+          <a:noFill/>
+          <a:ln/>
+        </p:spPr>
+        <p:txBody>
+          <a:bodyPr wrap="square" lIns="0" tIns="0" rIns="0" bIns="0" rtlCol="0" anchor="t"/>
+          <a:lstStyle/>
+          <a:p>
+            <a:pPr eaLnBrk="0" indent="0" marL="0">
+              <a:buNone/>
+            </a:pPr>
+            <a:r>
+              <a:rPr lang="ko-KR" altLang="en-US" sz="1200" dirty="0">
+                <a:solidFill>
+                  <a:srgbClr val="6A7180"/>
+                </a:solidFill>
+                <a:latin typeface="맑은 고딕" pitchFamily="34" charset="0"/>
+                <a:ea typeface="맑은 고딕" pitchFamily="34" charset="-127"/>
+                <a:cs typeface="맑은 고딕" pitchFamily="34" charset="-120"/>
+              </a:rPr>
+              <a:t>발표 정윤서</a:t>
+            </a:r>
+            <a:endParaRPr lang="ko-KR" altLang="en-US" sz="1200" dirty="0"/>
+          </a:p>
+        </p:txBody>
+      </p:sp>
       <p:sp>
         <p:nvSpPr>
           <p:cNvPr id="7" name="Text 4"/>
@@ -4093,12 +4242,12 @@
 </file>
 
 <file path=ppt/slides/slide6.xml><?xml version="1.0" encoding="utf-8"?>
-<p:sld xmlns:r="http://schemas.openxmlformats.org/officeDocument/2006/relationships" xmlns:c="http://schemas.openxmlformats.org/drawingml/2006/chart" xmlns:a="http://schemas.openxmlformats.org/drawingml/2006/main" xmlns:dgm="http://schemas.openxmlformats.org/drawingml/2006/diagram" xmlns:dsp="http://schemas.microsoft.com/office/drawing/2008/diagram" xmlns:p="http://schemas.openxmlformats.org/presentationml/2006/main">
+<p:sld xmlns:a="http://schemas.openxmlformats.org/drawingml/2006/main" xmlns:r="http://schemas.openxmlformats.org/officeDocument/2006/relationships" xmlns:p="http://schemas.openxmlformats.org/presentationml/2006/main">
   <p:cSld name="Slide 6">
     <p:bg>
-      <p:bgPr shadeToTitle="0">
+      <p:bgPr>
         <a:solidFill>
-          <a:srgbClr val="eceae3"/>
+          <a:srgbClr val="ECEAE3"/>
         </a:solidFill>
       </p:bgPr>
     </p:bg>
@@ -4936,6 +5085,45 @@
       </p:sp>
       <p:sp>
         <p:nvSpPr>
+          <p:cNvPr id="22" name="Text 20"/>
+          <p:cNvSpPr txBox="1"/>
+          <p:nvPr/>
+        </p:nvSpPr>
+        <p:spPr>
+          <a:xfrm>
+            <a:off x="812800" y="6223000"/>
+            <a:ext cx="8890000" cy="228600"/>
+          </a:xfrm>
+          <a:prstGeom prst="rect">
+            <a:avLst/>
+          </a:prstGeom>
+          <a:noFill/>
+          <a:ln/>
+        </p:spPr>
+        <p:txBody>
+          <a:bodyPr wrap="square" lIns="0" tIns="0" rIns="0" bIns="0" rtlCol="0" anchor="t"/>
+          <a:lstStyle/>
+          <a:p>
+            <a:pPr eaLnBrk="0" indent="0" marL="0">
+              <a:buNone/>
+            </a:pPr>
+            <a:r>
+              <a:rPr lang="ko-KR" altLang="en-US" sz="1200" dirty="0">
+                <a:solidFill>
+                  <a:srgbClr val="6A7180"/>
+                </a:solidFill>
+                <a:latin typeface="맑은 고딕" pitchFamily="34" charset="0"/>
+                <a:ea typeface="맑은 고딕" pitchFamily="34" charset="-127"/>
+                <a:cs typeface="맑은 고딕" pitchFamily="34" charset="-120"/>
+              </a:rPr>
+              <a:t>발표 이동건</a:t>
+            </a:r>
+            <a:endParaRPr lang="ko-KR" altLang="en-US" sz="1200" dirty="0"/>
+          </a:p>
+        </p:txBody>
+      </p:sp>
+      <p:sp>
+        <p:nvSpPr>
           <p:cNvPr id="23" name="Text 21"/>
           <p:cNvSpPr txBox="1"/>
           <p:nvPr/>
@@ -4982,12 +5170,12 @@
 </file>
 
 <file path=ppt/slides/slide7.xml><?xml version="1.0" encoding="utf-8"?>
-<p:sld xmlns:r="http://schemas.openxmlformats.org/officeDocument/2006/relationships" xmlns:c="http://schemas.openxmlformats.org/drawingml/2006/chart" xmlns:a="http://schemas.openxmlformats.org/drawingml/2006/main" xmlns:dgm="http://schemas.openxmlformats.org/drawingml/2006/diagram" xmlns:dsp="http://schemas.microsoft.com/office/drawing/2008/diagram" xmlns:p="http://schemas.openxmlformats.org/presentationml/2006/main">
+<p:sld xmlns:a="http://schemas.openxmlformats.org/drawingml/2006/main" xmlns:r="http://schemas.openxmlformats.org/officeDocument/2006/relationships" xmlns:p="http://schemas.openxmlformats.org/presentationml/2006/main">
   <p:cSld name="Slide 7">
     <p:bg>
-      <p:bgPr shadeToTitle="0">
+      <p:bgPr>
         <a:solidFill>
-          <a:srgbClr val="eceae3"/>
+          <a:srgbClr val="ECEAE3"/>
         </a:solidFill>
       </p:bgPr>
     </p:bg>
@@ -5180,7 +5368,7 @@
                 <a:ea typeface="맑은 고딕" pitchFamily="34" charset="-127"/>
                 <a:cs typeface="맑은 고딕" pitchFamily="34" charset="-120"/>
               </a:rPr>
-              <a:t>학교 주변 매장 10곳 이상에서 촬영(6~9주), 사진마다 정답 버튼 라벨링</a:t>
+              <a:t>매장 10곳 이상에서 촬영(9~11주), 짧은 영상에서 고른 장면도 포함</a:t>
             </a:r>
             <a:endParaRPr lang="ko-KR" altLang="en-US" sz="1400" dirty="0"/>
           </a:p>
@@ -5222,7 +5410,7 @@
                 <a:ea typeface="맑은 고딕" pitchFamily="34" charset="-127"/>
                 <a:cs typeface="맑은 고딕" pitchFamily="34" charset="-120"/>
               </a:rPr>
-              <a:t>학습 없는 기본 방식에서는 평가용으로만 사용</a:t>
+              <a:t>사진마다 정답 버튼 라벨링, 기본 방식에서는 평가용으로만 사용</a:t>
             </a:r>
             <a:endParaRPr lang="ko-KR" altLang="en-US" sz="1400" dirty="0"/>
           </a:p>
@@ -6497,6 +6685,45 @@
       </p:graphicFrame>
       <p:sp>
         <p:nvSpPr>
+          <p:cNvPr id="9" name="Text 6"/>
+          <p:cNvSpPr txBox="1"/>
+          <p:nvPr/>
+        </p:nvSpPr>
+        <p:spPr>
+          <a:xfrm>
+            <a:off x="812800" y="6223000"/>
+            <a:ext cx="8890000" cy="228600"/>
+          </a:xfrm>
+          <a:prstGeom prst="rect">
+            <a:avLst/>
+          </a:prstGeom>
+          <a:noFill/>
+          <a:ln/>
+        </p:spPr>
+        <p:txBody>
+          <a:bodyPr wrap="square" lIns="0" tIns="0" rIns="0" bIns="0" rtlCol="0" anchor="t"/>
+          <a:lstStyle/>
+          <a:p>
+            <a:pPr eaLnBrk="0" indent="0" marL="0">
+              <a:buNone/>
+            </a:pPr>
+            <a:r>
+              <a:rPr lang="ko-KR" altLang="en-US" sz="1200" dirty="0">
+                <a:solidFill>
+                  <a:srgbClr val="6A7180"/>
+                </a:solidFill>
+                <a:latin typeface="맑은 고딕" pitchFamily="34" charset="0"/>
+                <a:ea typeface="맑은 고딕" pitchFamily="34" charset="-127"/>
+                <a:cs typeface="맑은 고딕" pitchFamily="34" charset="-120"/>
+              </a:rPr>
+              <a:t>발표 이동건</a:t>
+            </a:r>
+            <a:endParaRPr lang="ko-KR" altLang="en-US" sz="1200" dirty="0"/>
+          </a:p>
+        </p:txBody>
+      </p:sp>
+      <p:sp>
+        <p:nvSpPr>
           <p:cNvPr id="10" name="Text 7"/>
           <p:cNvSpPr txBox="1"/>
           <p:nvPr/>
@@ -6543,12 +6770,12 @@
 </file>
 
 <file path=ppt/slides/slide8.xml><?xml version="1.0" encoding="utf-8"?>
-<p:sld xmlns:r="http://schemas.openxmlformats.org/officeDocument/2006/relationships" xmlns:c="http://schemas.openxmlformats.org/drawingml/2006/chart" xmlns:a="http://schemas.openxmlformats.org/drawingml/2006/main" xmlns:dgm="http://schemas.openxmlformats.org/drawingml/2006/diagram" xmlns:dsp="http://schemas.microsoft.com/office/drawing/2008/diagram" xmlns:p="http://schemas.openxmlformats.org/presentationml/2006/main">
+<p:sld xmlns:a="http://schemas.openxmlformats.org/drawingml/2006/main" xmlns:r="http://schemas.openxmlformats.org/officeDocument/2006/relationships" xmlns:p="http://schemas.openxmlformats.org/presentationml/2006/main">
   <p:cSld name="Slide 8">
     <p:bg>
-      <p:bgPr shadeToTitle="0">
+      <p:bgPr>
         <a:solidFill>
-          <a:srgbClr val="eceae3"/>
+          <a:srgbClr val="ECEAE3"/>
         </a:solidFill>
       </p:bgPr>
     </p:bg>
@@ -7058,6 +7285,45 @@
       </p:sp>
       <p:sp>
         <p:nvSpPr>
+          <p:cNvPr id="16" name="Text 14"/>
+          <p:cNvSpPr txBox="1"/>
+          <p:nvPr/>
+        </p:nvSpPr>
+        <p:spPr>
+          <a:xfrm>
+            <a:off x="812800" y="6223000"/>
+            <a:ext cx="8890000" cy="228600"/>
+          </a:xfrm>
+          <a:prstGeom prst="rect">
+            <a:avLst/>
+          </a:prstGeom>
+          <a:noFill/>
+          <a:ln/>
+        </p:spPr>
+        <p:txBody>
+          <a:bodyPr wrap="square" lIns="0" tIns="0" rIns="0" bIns="0" rtlCol="0" anchor="t"/>
+          <a:lstStyle/>
+          <a:p>
+            <a:pPr eaLnBrk="0" indent="0" marL="0">
+              <a:buNone/>
+            </a:pPr>
+            <a:r>
+              <a:rPr lang="ko-KR" altLang="en-US" sz="1200" dirty="0">
+                <a:solidFill>
+                  <a:srgbClr val="6A7180"/>
+                </a:solidFill>
+                <a:latin typeface="맑은 고딕" pitchFamily="34" charset="0"/>
+                <a:ea typeface="맑은 고딕" pitchFamily="34" charset="-127"/>
+                <a:cs typeface="맑은 고딕" pitchFamily="34" charset="-120"/>
+              </a:rPr>
+              <a:t>발표 이동건</a:t>
+            </a:r>
+            <a:endParaRPr lang="ko-KR" altLang="en-US" sz="1200" dirty="0"/>
+          </a:p>
+        </p:txBody>
+      </p:sp>
+      <p:sp>
+        <p:nvSpPr>
           <p:cNvPr id="17" name="Text 15"/>
           <p:cNvSpPr txBox="1"/>
           <p:nvPr/>
@@ -7104,12 +7370,12 @@
 </file>
 
 <file path=ppt/slides/slide9.xml><?xml version="1.0" encoding="utf-8"?>
-<p:sld xmlns:r="http://schemas.openxmlformats.org/officeDocument/2006/relationships" xmlns:c="http://schemas.openxmlformats.org/drawingml/2006/chart" xmlns:a="http://schemas.openxmlformats.org/drawingml/2006/main" xmlns:dgm="http://schemas.openxmlformats.org/drawingml/2006/diagram" xmlns:dsp="http://schemas.microsoft.com/office/drawing/2008/diagram" xmlns:p="http://schemas.openxmlformats.org/presentationml/2006/main">
+<p:sld xmlns:a="http://schemas.openxmlformats.org/drawingml/2006/main" xmlns:r="http://schemas.openxmlformats.org/officeDocument/2006/relationships" xmlns:p="http://schemas.openxmlformats.org/presentationml/2006/main">
   <p:cSld name="Slide 9">
     <p:bg>
-      <p:bgPr shadeToTitle="0">
+      <p:bgPr>
         <a:solidFill>
-          <a:srgbClr val="f7f6f2"/>
+          <a:srgbClr val="F7F6F2"/>
         </a:solidFill>
       </p:bgPr>
     </p:bg>
@@ -7199,7 +7465,7 @@
                 <a:ea typeface="맑은 고딕" pitchFamily="34" charset="-127"/>
                 <a:cs typeface="맑은 고딕" pitchFamily="34" charset="-120"/>
               </a:rPr>
-              <a:t>세 번의 스프린트마다 동작하는 버전을 배포합니다</a:t>
+              <a:t>9주부터 15주까지, 단계마다 동작하는 버전을 배포합니다</a:t>
             </a:r>
             <a:endParaRPr lang="ko-KR" altLang="en-US" sz="3200" dirty="0"/>
           </a:p>
@@ -7250,54 +7516,24 @@
           <a:ln/>
         </p:spPr>
         <p:txBody>
-          <a:bodyPr wrap="square" lIns="0" tIns="0" rIns="0" bIns="0" anchor="t"/>
-          <a:lstStyle/>
-          <a:p>
-            <a:pPr marL="0" lvl="0" indent="0" eaLnBrk="0">
-              <a:buNone/>
-              <a:defRPr/>
-            </a:pPr>
-            <a:r>
-              <a:rPr lang="ko-KR" altLang="en-US" sz="1500" b="1">
-                <a:solidFill>
-                  <a:srgbClr val="2b5fd9"/>
-                </a:solidFill>
-                <a:latin typeface="맑은 고딕"/>
-                <a:ea typeface="맑은 고딕"/>
-                <a:cs typeface="맑은 고딕"/>
-              </a:rPr>
-              <a:t>Sprint 1 · </a:t>
-            </a:r>
-            <a:r>
-              <a:rPr lang="en-US" altLang="ko-KR" sz="1500" b="1">
-                <a:solidFill>
-                  <a:srgbClr val="2b5fd9"/>
-                </a:solidFill>
-                <a:latin typeface="맑은 고딕"/>
-                <a:ea typeface="맑은 고딕"/>
-                <a:cs typeface="맑은 고딕"/>
-              </a:rPr>
-              <a:t>9</a:t>
-            </a:r>
-            <a:r>
-              <a:rPr lang="ko-KR" altLang="en-US" sz="1500" b="1">
-                <a:solidFill>
-                  <a:srgbClr val="2b5fd9"/>
-                </a:solidFill>
-                <a:latin typeface="맑은 고딕"/>
-                <a:ea typeface="맑은 고딕"/>
-                <a:cs typeface="맑은 고딕"/>
-              </a:rPr>
-              <a:t>주</a:t>
-            </a:r>
-            <a:endParaRPr lang="ko-KR" altLang="en-US" sz="1500" b="1">
-              <a:solidFill>
-                <a:srgbClr val="2b5fd9"/>
-              </a:solidFill>
-              <a:latin typeface="맑은 고딕"/>
-              <a:ea typeface="맑은 고딕"/>
-              <a:cs typeface="맑은 고딕"/>
-            </a:endParaRPr>
+          <a:bodyPr wrap="square" lIns="0" tIns="0" rIns="0" bIns="0" rtlCol="0" anchor="t"/>
+          <a:lstStyle/>
+          <a:p>
+            <a:pPr eaLnBrk="0" indent="0" marL="0">
+              <a:buNone/>
+            </a:pPr>
+            <a:r>
+              <a:rPr lang="ko-KR" altLang="en-US" sz="1500" b="1" dirty="0">
+                <a:solidFill>
+                  <a:srgbClr val="2B5FD9"/>
+                </a:solidFill>
+                <a:latin typeface="맑은 고딕" pitchFamily="34" charset="0"/>
+                <a:ea typeface="맑은 고딕" pitchFamily="34" charset="-127"/>
+                <a:cs typeface="맑은 고딕" pitchFamily="34" charset="-120"/>
+              </a:rPr>
+              <a:t>9~10주 · 첫 버전</a:t>
+            </a:r>
+            <a:endParaRPr lang="ko-KR" altLang="en-US" sz="1500" dirty="0"/>
           </a:p>
         </p:txBody>
       </p:sp>
@@ -7403,7 +7639,7 @@
                 <a:ea typeface="맑은 고딕" pitchFamily="34" charset="-127"/>
                 <a:cs typeface="맑은 고딕" pitchFamily="34" charset="-120"/>
               </a:rPr>
-              <a:t>Sprint 2 · 12주</a:t>
+              <a:t>11~12주 · Sprint 2</a:t>
             </a:r>
             <a:endParaRPr lang="ko-KR" altLang="en-US" sz="1500" dirty="0"/>
           </a:p>
@@ -7511,7 +7747,7 @@
                 <a:ea typeface="맑은 고딕" pitchFamily="34" charset="-127"/>
                 <a:cs typeface="맑은 고딕" pitchFamily="34" charset="-120"/>
               </a:rPr>
-              <a:t>Sprint 3 · 15주</a:t>
+              <a:t>13~15주 · Sprint 3</a:t>
             </a:r>
             <a:endParaRPr lang="ko-KR" altLang="en-US" sz="1500" dirty="0"/>
           </a:p>
@@ -7796,6 +8032,45 @@
               <a:t>화면, 음성, API, 배포, 사용성 테스트</a:t>
             </a:r>
             <a:endParaRPr lang="ko-KR" altLang="en-US" sz="1400" dirty="0"/>
+          </a:p>
+        </p:txBody>
+      </p:sp>
+      <p:sp>
+        <p:nvSpPr>
+          <p:cNvPr id="21" name="Text 19"/>
+          <p:cNvSpPr txBox="1"/>
+          <p:nvPr/>
+        </p:nvSpPr>
+        <p:spPr>
+          <a:xfrm>
+            <a:off x="812800" y="6223000"/>
+            <a:ext cx="8890000" cy="228600"/>
+          </a:xfrm>
+          <a:prstGeom prst="rect">
+            <a:avLst/>
+          </a:prstGeom>
+          <a:noFill/>
+          <a:ln/>
+        </p:spPr>
+        <p:txBody>
+          <a:bodyPr wrap="square" lIns="0" tIns="0" rIns="0" bIns="0" rtlCol="0" anchor="t"/>
+          <a:lstStyle/>
+          <a:p>
+            <a:pPr eaLnBrk="0" indent="0" marL="0">
+              <a:buNone/>
+            </a:pPr>
+            <a:r>
+              <a:rPr lang="ko-KR" altLang="en-US" sz="1200" dirty="0">
+                <a:solidFill>
+                  <a:srgbClr val="6A7180"/>
+                </a:solidFill>
+                <a:latin typeface="맑은 고딕" pitchFamily="34" charset="0"/>
+                <a:ea typeface="맑은 고딕" pitchFamily="34" charset="-127"/>
+                <a:cs typeface="맑은 고딕" pitchFamily="34" charset="-120"/>
+              </a:rPr>
+              <a:t>사진 수집과 라벨링은 공동 · 발표 이동건</a:t>
+            </a:r>
+            <a:endParaRPr lang="ko-KR" altLang="en-US" sz="1200" dirty="0"/>
           </a:p>
         </p:txBody>
       </p:sp>
@@ -7847,44 +8122,44 @@
 </file>
 
 <file path=ppt/theme/theme1.xml><?xml version="1.0" encoding="utf-8"?>
-<a:theme xmlns:r="http://schemas.openxmlformats.org/officeDocument/2006/relationships" xmlns:c="http://schemas.openxmlformats.org/drawingml/2006/chart" xmlns:dgm="http://schemas.openxmlformats.org/drawingml/2006/diagram" xmlns:dsp="http://schemas.microsoft.com/office/drawing/2008/diagram" xmlns:a="http://schemas.openxmlformats.org/drawingml/2006/main" xmlns:pic="http://schemas.openxmlformats.org/drawingml/2006/picture" xmlns:wp="http://schemas.openxmlformats.org/drawingml/2006/wordprocessingDrawing" xmlns:xdr="http://schemas.openxmlformats.org/drawingml/2006/spreadsheetDrawing" xmlns:lc="http://schemas.openxmlformats.org/drawingml/2006/lockedCanvas" xmlns:p="http://schemas.openxmlformats.org/presentationml/2006/main" name="Office Theme">
+<a:theme xmlns:a="http://schemas.openxmlformats.org/drawingml/2006/main" name="Office Theme">
   <a:themeElements>
     <a:clrScheme name="Office">
       <a:dk1>
         <a:sysClr val="windowText" lastClr="000000"/>
       </a:dk1>
       <a:lt1>
-        <a:sysClr val="window" lastClr="ffffff"/>
+        <a:sysClr val="window" lastClr="FFFFFF"/>
       </a:lt1>
       <a:dk2>
-        <a:srgbClr val="44546a"/>
+        <a:srgbClr val="44546A"/>
       </a:dk2>
       <a:lt2>
-        <a:srgbClr val="e7e6e6"/>
+        <a:srgbClr val="E7E6E6"/>
       </a:lt2>
       <a:accent1>
-        <a:srgbClr val="4472c4"/>
+        <a:srgbClr val="4472C4"/>
       </a:accent1>
       <a:accent2>
-        <a:srgbClr val="ed7d31"/>
+        <a:srgbClr val="ED7D31"/>
       </a:accent2>
       <a:accent3>
-        <a:srgbClr val="a5a5a5"/>
+        <a:srgbClr val="A5A5A5"/>
       </a:accent3>
       <a:accent4>
-        <a:srgbClr val="ffc000"/>
+        <a:srgbClr val="FFC000"/>
       </a:accent4>
       <a:accent5>
-        <a:srgbClr val="5b9bd5"/>
+        <a:srgbClr val="5B9BD5"/>
       </a:accent5>
       <a:accent6>
-        <a:srgbClr val="70ad47"/>
+        <a:srgbClr val="70AD47"/>
       </a:accent6>
       <a:hlink>
-        <a:srgbClr val="0563c1"/>
+        <a:srgbClr val="0563C1"/>
       </a:hlink>
       <a:folHlink>
-        <a:srgbClr val="954f72"/>
+        <a:srgbClr val="954F72"/>
       </a:folHlink>
     </a:clrScheme>
     <a:fontScheme name="Office">
@@ -7892,7 +8167,7 @@
         <a:latin typeface="맑은 고딕"/>
         <a:ea typeface=""/>
         <a:cs typeface=""/>
-        <a:font script="Jpan" typeface="Yu Gothic Light"/>
+        <a:font script="Jpan" typeface="游ゴシック Light"/>
         <a:font script="Hang" typeface="맑은 고딕"/>
         <a:font script="Hans" typeface="等线 Light"/>
         <a:font script="Hant" typeface="新細明體"/>
@@ -7944,7 +8219,7 @@
         <a:latin typeface="맑은 고딕"/>
         <a:ea typeface=""/>
         <a:cs typeface=""/>
-        <a:font script="Jpan" typeface="Yu Gothic"/>
+        <a:font script="Jpan" typeface="游ゴシック"/>
         <a:font script="Hang" typeface="맑은 고딕"/>
         <a:font script="Hans" typeface="等线"/>
         <a:font script="Hant" typeface="新細明體"/>
@@ -8057,21 +8332,21 @@
             <a:schemeClr val="phClr"/>
           </a:solidFill>
           <a:prstDash val="solid"/>
-          <a:miter/>
+          <a:miter lim="800000"/>
         </a:ln>
         <a:ln w="12700" cap="flat" cmpd="sng" algn="ctr">
           <a:solidFill>
             <a:schemeClr val="phClr"/>
           </a:solidFill>
           <a:prstDash val="solid"/>
-          <a:miter/>
+          <a:miter lim="800000"/>
         </a:ln>
         <a:ln w="19050" cap="flat" cmpd="sng" algn="ctr">
           <a:solidFill>
             <a:schemeClr val="phClr"/>
           </a:solidFill>
           <a:prstDash val="solid"/>
-          <a:miter/>
+          <a:miter lim="800000"/>
         </a:ln>
       </a:lnStyleLst>
       <a:effectStyleLst>
@@ -8131,272 +8406,12 @@
       </a:bgFillStyleLst>
     </a:fmtScheme>
   </a:themeElements>
-</a:theme>
-</file>
-
-<file path=ppt/theme/theme2.xml><?xml version="1.0" encoding="utf-8"?>
-<a:theme xmlns:r="http://schemas.openxmlformats.org/officeDocument/2006/relationships" xmlns:c="http://schemas.openxmlformats.org/drawingml/2006/chart" xmlns:dgm="http://schemas.openxmlformats.org/drawingml/2006/diagram" xmlns:dsp="http://schemas.microsoft.com/office/drawing/2008/diagram" xmlns:a="http://schemas.openxmlformats.org/drawingml/2006/main" xmlns:pic="http://schemas.openxmlformats.org/drawingml/2006/picture" xmlns:wp="http://schemas.openxmlformats.org/drawingml/2006/wordprocessingDrawing" xmlns:xdr="http://schemas.openxmlformats.org/drawingml/2006/spreadsheetDrawing" xmlns:lc="http://schemas.openxmlformats.org/drawingml/2006/lockedCanvas" xmlns:p="http://schemas.openxmlformats.org/presentationml/2006/main" name="한컴오피스">
-  <a:themeElements>
-    <a:clrScheme name="한컴오피스">
-      <a:dk1>
-        <a:sysClr val="windowText" lastClr="000000"/>
-      </a:dk1>
-      <a:lt1>
-        <a:sysClr val="window" lastClr="ffffff"/>
-      </a:lt1>
-      <a:dk2>
-        <a:srgbClr val="3a3c84"/>
-      </a:dk2>
-      <a:lt2>
-        <a:srgbClr val="faf3db"/>
-      </a:lt2>
-      <a:accent1>
-        <a:srgbClr val="6182d6"/>
-      </a:accent1>
-      <a:accent2>
-        <a:srgbClr val="ff843a"/>
-      </a:accent2>
-      <a:accent3>
-        <a:srgbClr val="b2b2b2"/>
-      </a:accent3>
-      <a:accent4>
-        <a:srgbClr val="ffd700"/>
-      </a:accent4>
-      <a:accent5>
-        <a:srgbClr val="289b6e"/>
-      </a:accent5>
-      <a:accent6>
-        <a:srgbClr val="9d5cbb"/>
-      </a:accent6>
-      <a:hlink>
-        <a:srgbClr val="4a45ff"/>
-      </a:hlink>
-      <a:folHlink>
-        <a:srgbClr val="be27bb"/>
-      </a:folHlink>
-    </a:clrScheme>
-    <a:fontScheme name="한컴오피스">
-      <a:majorFont>
-        <a:latin typeface="Calibri"/>
-        <a:ea typeface=""/>
-        <a:cs typeface=""/>
-        <a:font script="Jpan" typeface="MS PGothic"/>
-        <a:font script="Hang" typeface="맑은 고딕"/>
-        <a:font script="Hans" typeface="SimSun"/>
-        <a:font script="Hant" typeface="新細明體"/>
-        <a:font script="Arab" typeface="Times New Roman"/>
-        <a:font script="Hebr" typeface="Times New Roman"/>
-        <a:font script="Thai" typeface="Angsana New"/>
-        <a:font script="Beng" typeface="Vrinda"/>
-        <a:font script="Gujr" typeface="Shruti"/>
-        <a:font script="Khmr" typeface="MoolBoran"/>
-        <a:font script="Knda" typeface="Tunga"/>
-        <a:font script="Guru" typeface="Raavi"/>
-        <a:font script="Cans" typeface="Euphemia"/>
-        <a:font script="Cher" typeface="Plantagenet Cherokee"/>
-        <a:font script="Yiii" typeface="Microsoft Yi Baiti"/>
-        <a:font script="Tibt" typeface="Microsoft Himalaya"/>
-        <a:font script="Thaa" typeface="MV Boli"/>
-        <a:font script="Deva" typeface="Mangal"/>
-        <a:font script="Telu" typeface="Gautami"/>
-        <a:font script="Taml" typeface="Latha"/>
-        <a:font script="Syrc" typeface="Estrangelo Edessa"/>
-        <a:font script="Orya" typeface="Kalinga"/>
-        <a:font script="Mlym" typeface="Kartika"/>
-        <a:font script="Laoo" typeface="DokChampa"/>
-        <a:font script="Sinh" typeface="Iskoola Pota"/>
-        <a:font script="Mong" typeface="Mongolian Baiti"/>
-        <a:font script="Viet" typeface="Times New Roman"/>
-        <a:font script="Uigh" typeface="Microsoft Uighur"/>
-        <a:font script="Ethi" typeface="Leelawadee UI"/>
-        <a:font script="Mymr" typeface="Myanmar Text"/>
-      </a:majorFont>
-      <a:minorFont>
-        <a:latin typeface="Calibri"/>
-        <a:ea typeface=""/>
-        <a:cs typeface=""/>
-        <a:font script="Jpan" typeface="MS PGothic"/>
-        <a:font script="Hang" typeface="맑은 고딕"/>
-        <a:font script="Hans" typeface="SimSun"/>
-        <a:font script="Hant" typeface="新細明體"/>
-        <a:font script="Arab" typeface="Times New Roman"/>
-        <a:font script="Hebr" typeface="Times New Roman"/>
-        <a:font script="Thai" typeface="Angsana New"/>
-        <a:font script="Beng" typeface="Vrinda"/>
-        <a:font script="Gujr" typeface="Shruti"/>
-        <a:font script="Khmr" typeface="MoolBoran"/>
-        <a:font script="Knda" typeface="Tunga"/>
-        <a:font script="Guru" typeface="Raavi"/>
-        <a:font script="Cans" typeface="Euphemia"/>
-        <a:font script="Cher" typeface="Plantagenet Cherokee"/>
-        <a:font script="Yiii" typeface="Microsoft Yi Baiti"/>
-        <a:font script="Tibt" typeface="Microsoft Himalaya"/>
-        <a:font script="Thaa" typeface="MV Boli"/>
-        <a:font script="Deva" typeface="Mangal"/>
-        <a:font script="Telu" typeface="Gautami"/>
-        <a:font script="Taml" typeface="Latha"/>
-        <a:font script="Syrc" typeface="Estrangelo Edessa"/>
-        <a:font script="Orya" typeface="Kalinga"/>
-        <a:font script="Mlym" typeface="Kartika"/>
-        <a:font script="Laoo" typeface="DokChampa"/>
-        <a:font script="Sinh" typeface="Iskoola Pota"/>
-        <a:font script="Mong" typeface="Mongolian Baiti"/>
-        <a:font script="Viet" typeface="Times New Roman"/>
-        <a:font script="Uigh" typeface="Microsoft Uighur"/>
-        <a:font script="Ethi" typeface="Leelawadee UI"/>
-        <a:font script="Mymr" typeface="Myanmar Text"/>
-      </a:minorFont>
-    </a:fontScheme>
-    <a:fmtScheme name="한컴오피스">
-      <a:fillStyleLst>
-        <a:solidFill>
-          <a:schemeClr val="phClr"/>
-        </a:solidFill>
-        <a:gradFill rotWithShape="1">
-          <a:gsLst>
-            <a:gs pos="0">
-              <a:schemeClr val="phClr">
-                <a:tint val="50000"/>
-                <a:satMod val="300000"/>
-              </a:schemeClr>
-            </a:gs>
-            <a:gs pos="35000">
-              <a:schemeClr val="phClr">
-                <a:tint val="37000"/>
-                <a:satMod val="300000"/>
-              </a:schemeClr>
-            </a:gs>
-            <a:gs pos="100000">
-              <a:schemeClr val="phClr">
-                <a:tint val="15000"/>
-                <a:satMod val="350000"/>
-              </a:schemeClr>
-            </a:gs>
-          </a:gsLst>
-          <a:lin ang="16200000" scaled="1"/>
-        </a:gradFill>
-        <a:gradFill rotWithShape="1">
-          <a:gsLst>
-            <a:gs pos="0">
-              <a:schemeClr val="phClr">
-                <a:shade val="51000"/>
-                <a:satMod val="130000"/>
-              </a:schemeClr>
-            </a:gs>
-            <a:gs pos="80000">
-              <a:schemeClr val="phClr">
-                <a:shade val="93000"/>
-                <a:satMod val="130000"/>
-              </a:schemeClr>
-            </a:gs>
-            <a:gs pos="100000">
-              <a:schemeClr val="phClr">
-                <a:shade val="94000"/>
-                <a:satMod val="135000"/>
-              </a:schemeClr>
-            </a:gs>
-          </a:gsLst>
-          <a:lin ang="16200000" scaled="0"/>
-        </a:gradFill>
-      </a:fillStyleLst>
-      <a:lnStyleLst>
-        <a:ln w="12700" cap="flat" cmpd="sng" algn="ctr">
-          <a:solidFill>
-            <a:schemeClr val="phClr">
-              <a:satMod val="105000"/>
-            </a:schemeClr>
-          </a:solidFill>
-          <a:prstDash val="solid"/>
-        </a:ln>
-        <a:ln w="19050" cap="flat" cmpd="sng" algn="ctr">
-          <a:solidFill>
-            <a:schemeClr val="phClr"/>
-          </a:solidFill>
-          <a:prstDash val="solid"/>
-        </a:ln>
-        <a:ln w="38100" cap="flat" cmpd="sng" algn="ctr">
-          <a:solidFill>
-            <a:schemeClr val="phClr"/>
-          </a:solidFill>
-          <a:prstDash val="solid"/>
-        </a:ln>
-      </a:lnStyleLst>
-      <a:effectStyleLst>
-        <a:effectStyle>
-          <a:effectLst>
-            <a:outerShdw blurRad="38100" dist="25400" dir="5400000" rotWithShape="0">
-              <a:srgbClr val="000000">
-                <a:alpha val="75000"/>
-              </a:srgbClr>
-            </a:outerShdw>
-          </a:effectLst>
-        </a:effectStyle>
-        <a:effectStyle>
-          <a:effectLst>
-            <a:outerShdw blurRad="38100" dist="25400" dir="5400000" rotWithShape="0">
-              <a:srgbClr val="000000">
-                <a:alpha val="75000"/>
-              </a:srgbClr>
-            </a:outerShdw>
-          </a:effectLst>
-        </a:effectStyle>
-        <a:effectStyle>
-          <a:effectLst>
-            <a:reflection blurRad="12700" stA="26000" endPos="28000" dist="38100" dir="5400000" sy="-100000" rotWithShape="0"/>
-          </a:effectLst>
-        </a:effectStyle>
-      </a:effectStyleLst>
-      <a:bgFillStyleLst>
-        <a:solidFill>
-          <a:schemeClr val="phClr"/>
-        </a:solidFill>
-        <a:gradFill rotWithShape="1">
-          <a:gsLst>
-            <a:gs pos="0">
-              <a:schemeClr val="phClr">
-                <a:tint val="40000"/>
-                <a:satMod val="350000"/>
-              </a:schemeClr>
-            </a:gs>
-            <a:gs pos="40000">
-              <a:schemeClr val="phClr">
-                <a:tint val="45000"/>
-                <a:shade val="99000"/>
-                <a:satMod val="350000"/>
-              </a:schemeClr>
-            </a:gs>
-            <a:gs pos="100000">
-              <a:schemeClr val="phClr">
-                <a:shade val="20000"/>
-                <a:satMod val="255000"/>
-              </a:schemeClr>
-            </a:gs>
-          </a:gsLst>
-          <a:path path="circle">
-            <a:fillToRect l="50000" t="-80000" r="50000" b="180000"/>
-          </a:path>
-        </a:gradFill>
-        <a:gradFill rotWithShape="1">
-          <a:gsLst>
-            <a:gs pos="0">
-              <a:schemeClr val="phClr">
-                <a:tint val="80000"/>
-                <a:satMod val="300000"/>
-              </a:schemeClr>
-            </a:gs>
-            <a:gs pos="100000">
-              <a:schemeClr val="phClr">
-                <a:shade val="30000"/>
-                <a:satMod val="200000"/>
-              </a:schemeClr>
-            </a:gs>
-          </a:gsLst>
-          <a:path path="circle">
-            <a:fillToRect l="50000" t="50000" r="50000" b="50000"/>
-          </a:path>
-        </a:gradFill>
-      </a:bgFillStyleLst>
-    </a:fmtScheme>
-  </a:themeElements>
+  <a:objectDefaults/>
+  <a:extraClrSchemeLst/>
+  <a:extLst>
+    <a:ext uri="{05A4C25C-085E-4340-85A3-A5531E510DB2}">
+      <thm15:themeFamily xmlns:thm15="http://schemas.microsoft.com/office/thememl/2012/main" name="Office Theme" id="{62F939B6-93AF-4DB8-9C6B-D6C7DFDC589F}" vid="{4A3C46E8-61CC-4603-A589-7422A47A8E4A}"/>
+    </a:ext>
+  </a:extLst>
 </a:theme>
 </file>
--- a/자료/발표자료-KIOSSON.pptx
+++ b/자료/발표자료-KIOSSON.pptx
@@ -1,24 +1,24 @@
 
 <file path=ppt/presentation.xml><?xml version="1.0" encoding="utf-8"?>
-<p:presentation xmlns:a="http://schemas.openxmlformats.org/drawingml/2006/main" xmlns:r="http://schemas.openxmlformats.org/officeDocument/2006/relationships" xmlns:p="http://schemas.openxmlformats.org/presentationml/2006/main" saveSubsetFonts="1" autoCompressPictures="0">
+<p:presentation xmlns:r="http://schemas.openxmlformats.org/officeDocument/2006/relationships" xmlns:c="http://schemas.openxmlformats.org/drawingml/2006/chart" xmlns:a="http://schemas.openxmlformats.org/drawingml/2006/main" xmlns:dgm="http://schemas.openxmlformats.org/drawingml/2006/diagram" xmlns:dsp="http://schemas.microsoft.com/office/drawing/2008/diagram" xmlns:p="http://schemas.openxmlformats.org/presentationml/2006/main" autoCompressPictures="0">
   <p:sldMasterIdLst>
     <p:sldMasterId id="2147483648" r:id="rId1"/>
   </p:sldMasterIdLst>
+  <p:notesMasterIdLst>
+    <p:notesMasterId r:id="rId2"/>
+  </p:notesMasterIdLst>
   <p:sldIdLst>
-    <p:sldId id="256" r:id="rId2"/>
-    <p:sldId id="257" r:id="rId3"/>
-    <p:sldId id="258" r:id="rId4"/>
-    <p:sldId id="259" r:id="rId5"/>
-    <p:sldId id="260" r:id="rId6"/>
-    <p:sldId id="261" r:id="rId7"/>
-    <p:sldId id="262" r:id="rId8"/>
-    <p:sldId id="263" r:id="rId9"/>
-    <p:sldId id="264" r:id="rId10"/>
-    <p:sldId id="265" r:id="rId11"/>
+    <p:sldId id="256" r:id="rId3"/>
+    <p:sldId id="257" r:id="rId4"/>
+    <p:sldId id="258" r:id="rId5"/>
+    <p:sldId id="259" r:id="rId6"/>
+    <p:sldId id="260" r:id="rId7"/>
+    <p:sldId id="261" r:id="rId8"/>
+    <p:sldId id="262" r:id="rId9"/>
+    <p:sldId id="263" r:id="rId10"/>
+    <p:sldId id="264" r:id="rId11"/>
+    <p:sldId id="265" r:id="rId12"/>
   </p:sldIdLst>
-  <p:notesMasterIdLst>
-    <p:notesMasterId r:id="rId12"/>
-  </p:notesMasterIdLst>
   <p:sldSz cx="12192000" cy="6858000"/>
   <p:notesSz cx="6858000" cy="12192000"/>
   <p:defaultTextStyle>
@@ -117,7 +117,7 @@
 </file>
 
 <file path=ppt/notesMasters/notesMaster1.xml><?xml version="1.0" encoding="utf-8"?>
-<p:notesMaster xmlns:a="http://schemas.openxmlformats.org/drawingml/2006/main" xmlns:r="http://schemas.openxmlformats.org/officeDocument/2006/relationships" xmlns:p="http://schemas.openxmlformats.org/presentationml/2006/main">
+<p:notesMaster xmlns:r="http://schemas.openxmlformats.org/officeDocument/2006/relationships" xmlns:c="http://schemas.openxmlformats.org/drawingml/2006/chart" xmlns:a="http://schemas.openxmlformats.org/drawingml/2006/main" xmlns:dgm="http://schemas.openxmlformats.org/drawingml/2006/diagram" xmlns:dsp="http://schemas.microsoft.com/office/drawing/2008/diagram" xmlns:p="http://schemas.openxmlformats.org/presentationml/2006/main">
   <p:cSld>
     <p:bg>
       <p:bgRef idx="1001">
@@ -145,7 +145,7 @@
             <a:spLocks noGrp="1"/>
           </p:cNvSpPr>
           <p:nvPr>
-            <p:ph type="hdr" sz="quarter"/>
+            <p:ph type="hdr" sz="quarter" idx="0"/>
           </p:nvPr>
         </p:nvSpPr>
         <p:spPr>
@@ -165,6 +165,7 @@
             </a:lvl1pPr>
           </a:lstStyle>
           <a:p>
+            <a:pPr lvl="0"/>
             <a:endParaRPr lang="en-US"/>
           </a:p>
         </p:txBody>
@@ -196,7 +197,8 @@
             </a:lvl1pPr>
           </a:lstStyle>
           <a:p>
-            <a:fld id="{5282F153-3F37-0F45-9E97-73ACFA13230C}" type="datetimeFigureOut">
+            <a:pPr lvl="0"/>
+            <a:fld id="{5282F153-3F37-0F45-9E97-73ACFA13230C}" type="datetime1">
               <a:rPr lang="en-US"/>
               <a:t>7/23/19</a:t>
             </a:fld>
@@ -208,7 +210,7 @@
         <p:nvSpPr>
           <p:cNvPr id="4" name="Slide Image Placeholder 3"/>
           <p:cNvSpPr>
-            <a:spLocks noGrp="1" noRot="1" noChangeAspect="1"/>
+            <a:spLocks noGrp="1" noRot="1" noChangeAspect="1" noTextEdit="1"/>
           </p:cNvSpPr>
           <p:nvPr>
             <p:ph type="sldImg" idx="2"/>
@@ -233,6 +235,7 @@
           <a:bodyPr vert="horz" lIns="91440" tIns="45720" rIns="91440" bIns="45720" rtlCol="0" anchor="ctr"/>
           <a:lstStyle/>
           <a:p>
+            <a:pPr lvl="0"/>
             <a:endParaRPr lang="en-US"/>
           </a:p>
         </p:txBody>
@@ -323,6 +326,7 @@
             </a:lvl1pPr>
           </a:lstStyle>
           <a:p>
+            <a:pPr lvl="0"/>
             <a:endParaRPr lang="en-US"/>
           </a:p>
         </p:txBody>
@@ -354,6 +358,7 @@
             </a:lvl1pPr>
           </a:lstStyle>
           <a:p>
+            <a:pPr lvl="0"/>
             <a:fld id="{CE5E9CC1-C706-0F49-92D6-E571CC5EEA8F}" type="slidenum">
               <a:rPr lang="en-US"/>
               <a:t>‹#›</a:t>
@@ -370,6 +375,7 @@
     </p:extLst>
   </p:cSld>
   <p:clrMap bg1="lt1" tx1="dk1" bg2="lt2" tx2="dk2" accent1="accent1" accent2="accent2" accent3="accent3" accent4="accent4" accent5="accent5" accent6="accent6" hlink="hlink" folHlink="folHlink"/>
+  <p:hf hdr="0" ftr="0" dt="0"/>
   <p:notesStyle>
     <a:lvl1pPr marL="0" algn="l" defTabSz="914400" rtl="0" eaLnBrk="1" latinLnBrk="0" hangingPunct="1">
       <a:defRPr sz="1200" kern="1200">
@@ -2236,12 +2242,12 @@
 </file>
 
 <file path=ppt/slides/slide2.xml><?xml version="1.0" encoding="utf-8"?>
-<p:sld xmlns:a="http://schemas.openxmlformats.org/drawingml/2006/main" xmlns:r="http://schemas.openxmlformats.org/officeDocument/2006/relationships" xmlns:p="http://schemas.openxmlformats.org/presentationml/2006/main">
+<p:sld xmlns:r="http://schemas.openxmlformats.org/officeDocument/2006/relationships" xmlns:c="http://schemas.openxmlformats.org/drawingml/2006/chart" xmlns:a="http://schemas.openxmlformats.org/drawingml/2006/main" xmlns:dgm="http://schemas.openxmlformats.org/drawingml/2006/diagram" xmlns:dsp="http://schemas.microsoft.com/office/drawing/2008/diagram" xmlns:p="http://schemas.openxmlformats.org/presentationml/2006/main">
   <p:cSld name="Slide 2">
     <p:bg>
-      <p:bgPr>
+      <p:bgPr shadeToTitle="0">
         <a:solidFill>
-          <a:srgbClr val="F7F6F2"/>
+          <a:srgbClr val="f7f6f2"/>
         </a:solidFill>
       </p:bgPr>
     </p:bg>
@@ -2739,24 +2745,25 @@
           <a:ln/>
         </p:spPr>
         <p:txBody>
-          <a:bodyPr wrap="square" lIns="0" tIns="0" rIns="0" bIns="0" rtlCol="0" anchor="t"/>
-          <a:lstStyle/>
-          <a:p>
-            <a:pPr eaLnBrk="0" indent="0" marL="0">
-              <a:buNone/>
-            </a:pPr>
-            <a:r>
-              <a:rPr lang="ko-KR" altLang="en-US" sz="1200" dirty="0">
-                <a:solidFill>
-                  <a:srgbClr val="6A7180"/>
-                </a:solidFill>
-                <a:latin typeface="맑은 고딕" pitchFamily="34" charset="0"/>
-                <a:ea typeface="맑은 고딕" pitchFamily="34" charset="-127"/>
-                <a:cs typeface="맑은 고딕" pitchFamily="34" charset="-120"/>
-              </a:rPr>
-              <a:t>출처: 과학기술정보통신부(이투데이), 서울디지털재단 2023, 보건복지부 2024 · 발표 정윤서</a:t>
-            </a:r>
-            <a:endParaRPr lang="ko-KR" altLang="en-US" sz="1200" dirty="0"/>
+          <a:bodyPr wrap="square" lIns="0" tIns="0" rIns="0" bIns="0" anchor="t"/>
+          <a:lstStyle/>
+          <a:p>
+            <a:pPr marL="0" lvl="0" indent="0" eaLnBrk="0">
+              <a:buNone/>
+              <a:defRPr/>
+            </a:pPr>
+            <a:r>
+              <a:rPr lang="ko-KR" altLang="en-US" sz="1200">
+                <a:solidFill>
+                  <a:srgbClr val="6a7180"/>
+                </a:solidFill>
+                <a:latin typeface="맑은 고딕"/>
+                <a:ea typeface="맑은 고딕"/>
+                <a:cs typeface="맑은 고딕"/>
+              </a:rPr>
+              <a:t>출처: 과학기술정보통신부(이투데이), 서울디지털재단 2023, 보건복지부 2024 ·</a:t>
+            </a:r>
+            <a:endParaRPr lang="ko-KR" altLang="en-US" sz="1200"/>
           </a:p>
         </p:txBody>
       </p:sp>
@@ -2808,12 +2815,12 @@
 </file>
 
 <file path=ppt/slides/slide3.xml><?xml version="1.0" encoding="utf-8"?>
-<p:sld xmlns:a="http://schemas.openxmlformats.org/drawingml/2006/main" xmlns:r="http://schemas.openxmlformats.org/officeDocument/2006/relationships" xmlns:p="http://schemas.openxmlformats.org/presentationml/2006/main">
+<p:sld xmlns:r="http://schemas.openxmlformats.org/officeDocument/2006/relationships" xmlns:c="http://schemas.openxmlformats.org/drawingml/2006/chart" xmlns:a="http://schemas.openxmlformats.org/drawingml/2006/main" xmlns:dgm="http://schemas.openxmlformats.org/drawingml/2006/diagram" xmlns:dsp="http://schemas.microsoft.com/office/drawing/2008/diagram" xmlns:p="http://schemas.openxmlformats.org/presentationml/2006/main">
   <p:cSld name="Slide 3">
     <p:bg>
-      <p:bgPr>
+      <p:bgPr shadeToTitle="0">
         <a:solidFill>
-          <a:srgbClr val="F7F6F2"/>
+          <a:srgbClr val="f7f6f2"/>
         </a:solidFill>
       </p:bgPr>
     </p:bg>
@@ -3368,45 +3375,6 @@
       </p:sp>
       <p:sp>
         <p:nvSpPr>
-          <p:cNvPr id="17" name="Text 15"/>
-          <p:cNvSpPr txBox="1"/>
-          <p:nvPr/>
-        </p:nvSpPr>
-        <p:spPr>
-          <a:xfrm>
-            <a:off x="812800" y="6223000"/>
-            <a:ext cx="8890000" cy="228600"/>
-          </a:xfrm>
-          <a:prstGeom prst="rect">
-            <a:avLst/>
-          </a:prstGeom>
-          <a:noFill/>
-          <a:ln/>
-        </p:spPr>
-        <p:txBody>
-          <a:bodyPr wrap="square" lIns="0" tIns="0" rIns="0" bIns="0" rtlCol="0" anchor="t"/>
-          <a:lstStyle/>
-          <a:p>
-            <a:pPr eaLnBrk="0" indent="0" marL="0">
-              <a:buNone/>
-            </a:pPr>
-            <a:r>
-              <a:rPr lang="ko-KR" altLang="en-US" sz="1200" dirty="0">
-                <a:solidFill>
-                  <a:srgbClr val="6A7180"/>
-                </a:solidFill>
-                <a:latin typeface="맑은 고딕" pitchFamily="34" charset="0"/>
-                <a:ea typeface="맑은 고딕" pitchFamily="34" charset="-127"/>
-                <a:cs typeface="맑은 고딕" pitchFamily="34" charset="-120"/>
-              </a:rPr>
-              <a:t>발표 정윤서</a:t>
-            </a:r>
-            <a:endParaRPr lang="ko-KR" altLang="en-US" sz="1200" dirty="0"/>
-          </a:p>
-        </p:txBody>
-      </p:sp>
-      <p:sp>
-        <p:nvSpPr>
           <p:cNvPr id="18" name="Text 16"/>
           <p:cNvSpPr txBox="1"/>
           <p:nvPr/>
@@ -3453,12 +3421,12 @@
 </file>
 
 <file path=ppt/slides/slide4.xml><?xml version="1.0" encoding="utf-8"?>
-<p:sld xmlns:a="http://schemas.openxmlformats.org/drawingml/2006/main" xmlns:r="http://schemas.openxmlformats.org/officeDocument/2006/relationships" xmlns:p="http://schemas.openxmlformats.org/presentationml/2006/main">
+<p:sld xmlns:r="http://schemas.openxmlformats.org/officeDocument/2006/relationships" xmlns:c="http://schemas.openxmlformats.org/drawingml/2006/chart" xmlns:a="http://schemas.openxmlformats.org/drawingml/2006/main" xmlns:dgm="http://schemas.openxmlformats.org/drawingml/2006/diagram" xmlns:dsp="http://schemas.microsoft.com/office/drawing/2008/diagram" xmlns:p="http://schemas.openxmlformats.org/presentationml/2006/main">
   <p:cSld name="Slide 4">
     <p:bg>
-      <p:bgPr>
+      <p:bgPr shadeToTitle="0">
         <a:solidFill>
-          <a:srgbClr val="F7F6F2"/>
+          <a:srgbClr val="f7f6f2"/>
         </a:solidFill>
       </p:bgPr>
     </p:bg>
@@ -3585,7 +3553,7 @@
           <p:nvPr/>
         </p:nvPicPr>
         <p:blipFill>
-          <a:blip r:embed="rId1"/>
+          <a:blip r:embed="rId3"/>
           <a:stretch>
             <a:fillRect/>
           </a:stretch>
@@ -3631,7 +3599,7 @@
           <p:nvPr/>
         </p:nvPicPr>
         <p:blipFill>
-          <a:blip r:embed="rId2"/>
+          <a:blip r:embed="rId4"/>
           <a:stretch>
             <a:fillRect/>
           </a:stretch>
@@ -3879,84 +3847,6 @@
               <a:t>누르면 바뀐 화면을 자동 인식, 완료까지</a:t>
             </a:r>
             <a:endParaRPr lang="ko-KR" altLang="en-US" sz="1500" dirty="0"/>
-          </a:p>
-        </p:txBody>
-      </p:sp>
-      <p:sp>
-        <p:nvSpPr>
-          <p:cNvPr id="12" name="Text 8"/>
-          <p:cNvSpPr txBox="1"/>
-          <p:nvPr/>
-        </p:nvSpPr>
-        <p:spPr>
-          <a:xfrm>
-            <a:off x="8483600" y="5207000"/>
-            <a:ext cx="2895600" cy="317500"/>
-          </a:xfrm>
-          <a:prstGeom prst="rect">
-            <a:avLst/>
-          </a:prstGeom>
-          <a:noFill/>
-          <a:ln/>
-        </p:spPr>
-        <p:txBody>
-          <a:bodyPr wrap="square" lIns="0" tIns="0" rIns="0" bIns="0" rtlCol="0" anchor="t"/>
-          <a:lstStyle/>
-          <a:p>
-            <a:pPr eaLnBrk="0" indent="0" marL="0">
-              <a:buNone/>
-            </a:pPr>
-            <a:r>
-              <a:rPr lang="ko-KR" altLang="en-US" sz="1300" dirty="0">
-                <a:solidFill>
-                  <a:srgbClr val="6A7180"/>
-                </a:solidFill>
-                <a:latin typeface="맑은 고딕" pitchFamily="34" charset="0"/>
-                <a:ea typeface="맑은 고딕" pitchFamily="34" charset="-127"/>
-                <a:cs typeface="맑은 고딕" pitchFamily="34" charset="-120"/>
-              </a:rPr>
-              <a:t>앱 설치 없이 링크로 여는 모바일 웹</a:t>
-            </a:r>
-            <a:endParaRPr lang="ko-KR" altLang="en-US" sz="1300" dirty="0"/>
-          </a:p>
-        </p:txBody>
-      </p:sp>
-      <p:sp>
-        <p:nvSpPr>
-          <p:cNvPr id="13" name="Text 9"/>
-          <p:cNvSpPr txBox="1"/>
-          <p:nvPr/>
-        </p:nvSpPr>
-        <p:spPr>
-          <a:xfrm>
-            <a:off x="812800" y="6223000"/>
-            <a:ext cx="8890000" cy="228600"/>
-          </a:xfrm>
-          <a:prstGeom prst="rect">
-            <a:avLst/>
-          </a:prstGeom>
-          <a:noFill/>
-          <a:ln/>
-        </p:spPr>
-        <p:txBody>
-          <a:bodyPr wrap="square" lIns="0" tIns="0" rIns="0" bIns="0" rtlCol="0" anchor="t"/>
-          <a:lstStyle/>
-          <a:p>
-            <a:pPr eaLnBrk="0" indent="0" marL="0">
-              <a:buNone/>
-            </a:pPr>
-            <a:r>
-              <a:rPr lang="ko-KR" altLang="en-US" sz="1200" dirty="0">
-                <a:solidFill>
-                  <a:srgbClr val="6A7180"/>
-                </a:solidFill>
-                <a:latin typeface="맑은 고딕" pitchFamily="34" charset="0"/>
-                <a:ea typeface="맑은 고딕" pitchFamily="34" charset="-127"/>
-                <a:cs typeface="맑은 고딕" pitchFamily="34" charset="-120"/>
-              </a:rPr>
-              <a:t>발표 정윤서</a:t>
-            </a:r>
-            <a:endParaRPr lang="ko-KR" altLang="en-US" sz="1200" dirty="0"/>
           </a:p>
         </p:txBody>
       </p:sp>
@@ -4008,12 +3898,12 @@
 </file>
 
 <file path=ppt/slides/slide5.xml><?xml version="1.0" encoding="utf-8"?>
-<p:sld xmlns:a="http://schemas.openxmlformats.org/drawingml/2006/main" xmlns:r="http://schemas.openxmlformats.org/officeDocument/2006/relationships" xmlns:p="http://schemas.openxmlformats.org/presentationml/2006/main">
+<p:sld xmlns:r="http://schemas.openxmlformats.org/officeDocument/2006/relationships" xmlns:c="http://schemas.openxmlformats.org/drawingml/2006/chart" xmlns:a="http://schemas.openxmlformats.org/drawingml/2006/main" xmlns:dgm="http://schemas.openxmlformats.org/drawingml/2006/diagram" xmlns:dsp="http://schemas.microsoft.com/office/drawing/2008/diagram" xmlns:p="http://schemas.openxmlformats.org/presentationml/2006/main">
   <p:cSld name="Slide 5">
     <p:bg>
-      <p:bgPr>
+      <p:bgPr shadeToTitle="0">
         <a:solidFill>
-          <a:srgbClr val="ECEAE3"/>
+          <a:srgbClr val="eceae3"/>
         </a:solidFill>
       </p:bgPr>
     </p:bg>
@@ -4140,7 +4030,7 @@
           <p:nvPr/>
         </p:nvPicPr>
         <p:blipFill>
-          <a:blip r:embed="rId1"/>
+          <a:blip r:embed="rId3"/>
           <a:stretch>
             <a:fillRect/>
           </a:stretch>
@@ -4155,45 +4045,6 @@
           </a:prstGeom>
         </p:spPr>
       </p:pic>
-      <p:sp>
-        <p:nvSpPr>
-          <p:cNvPr id="6" name="Text 3"/>
-          <p:cNvSpPr txBox="1"/>
-          <p:nvPr/>
-        </p:nvSpPr>
-        <p:spPr>
-          <a:xfrm>
-            <a:off x="812800" y="6223000"/>
-            <a:ext cx="8890000" cy="228600"/>
-          </a:xfrm>
-          <a:prstGeom prst="rect">
-            <a:avLst/>
-          </a:prstGeom>
-          <a:noFill/>
-          <a:ln/>
-        </p:spPr>
-        <p:txBody>
-          <a:bodyPr wrap="square" lIns="0" tIns="0" rIns="0" bIns="0" rtlCol="0" anchor="t"/>
-          <a:lstStyle/>
-          <a:p>
-            <a:pPr eaLnBrk="0" indent="0" marL="0">
-              <a:buNone/>
-            </a:pPr>
-            <a:r>
-              <a:rPr lang="ko-KR" altLang="en-US" sz="1200" dirty="0">
-                <a:solidFill>
-                  <a:srgbClr val="6A7180"/>
-                </a:solidFill>
-                <a:latin typeface="맑은 고딕" pitchFamily="34" charset="0"/>
-                <a:ea typeface="맑은 고딕" pitchFamily="34" charset="-127"/>
-                <a:cs typeface="맑은 고딕" pitchFamily="34" charset="-120"/>
-              </a:rPr>
-              <a:t>발표 정윤서</a:t>
-            </a:r>
-            <a:endParaRPr lang="ko-KR" altLang="en-US" sz="1200" dirty="0"/>
-          </a:p>
-        </p:txBody>
-      </p:sp>
       <p:sp>
         <p:nvSpPr>
           <p:cNvPr id="7" name="Text 4"/>
@@ -4242,12 +4093,12 @@
 </file>
 
 <file path=ppt/slides/slide6.xml><?xml version="1.0" encoding="utf-8"?>
-<p:sld xmlns:a="http://schemas.openxmlformats.org/drawingml/2006/main" xmlns:r="http://schemas.openxmlformats.org/officeDocument/2006/relationships" xmlns:p="http://schemas.openxmlformats.org/presentationml/2006/main">
+<p:sld xmlns:r="http://schemas.openxmlformats.org/officeDocument/2006/relationships" xmlns:c="http://schemas.openxmlformats.org/drawingml/2006/chart" xmlns:a="http://schemas.openxmlformats.org/drawingml/2006/main" xmlns:dgm="http://schemas.openxmlformats.org/drawingml/2006/diagram" xmlns:dsp="http://schemas.microsoft.com/office/drawing/2008/diagram" xmlns:p="http://schemas.openxmlformats.org/presentationml/2006/main">
   <p:cSld name="Slide 6">
     <p:bg>
-      <p:bgPr>
+      <p:bgPr shadeToTitle="0">
         <a:solidFill>
-          <a:srgbClr val="ECEAE3"/>
+          <a:srgbClr val="eceae3"/>
         </a:solidFill>
       </p:bgPr>
     </p:bg>
@@ -5085,45 +4936,6 @@
       </p:sp>
       <p:sp>
         <p:nvSpPr>
-          <p:cNvPr id="22" name="Text 20"/>
-          <p:cNvSpPr txBox="1"/>
-          <p:nvPr/>
-        </p:nvSpPr>
-        <p:spPr>
-          <a:xfrm>
-            <a:off x="812800" y="6223000"/>
-            <a:ext cx="8890000" cy="228600"/>
-          </a:xfrm>
-          <a:prstGeom prst="rect">
-            <a:avLst/>
-          </a:prstGeom>
-          <a:noFill/>
-          <a:ln/>
-        </p:spPr>
-        <p:txBody>
-          <a:bodyPr wrap="square" lIns="0" tIns="0" rIns="0" bIns="0" rtlCol="0" anchor="t"/>
-          <a:lstStyle/>
-          <a:p>
-            <a:pPr eaLnBrk="0" indent="0" marL="0">
-              <a:buNone/>
-            </a:pPr>
-            <a:r>
-              <a:rPr lang="ko-KR" altLang="en-US" sz="1200" dirty="0">
-                <a:solidFill>
-                  <a:srgbClr val="6A7180"/>
-                </a:solidFill>
-                <a:latin typeface="맑은 고딕" pitchFamily="34" charset="0"/>
-                <a:ea typeface="맑은 고딕" pitchFamily="34" charset="-127"/>
-                <a:cs typeface="맑은 고딕" pitchFamily="34" charset="-120"/>
-              </a:rPr>
-              <a:t>발표 이동건</a:t>
-            </a:r>
-            <a:endParaRPr lang="ko-KR" altLang="en-US" sz="1200" dirty="0"/>
-          </a:p>
-        </p:txBody>
-      </p:sp>
-      <p:sp>
-        <p:nvSpPr>
           <p:cNvPr id="23" name="Text 21"/>
           <p:cNvSpPr txBox="1"/>
           <p:nvPr/>
@@ -5170,12 +4982,12 @@
 </file>
 
 <file path=ppt/slides/slide7.xml><?xml version="1.0" encoding="utf-8"?>
-<p:sld xmlns:a="http://schemas.openxmlformats.org/drawingml/2006/main" xmlns:r="http://schemas.openxmlformats.org/officeDocument/2006/relationships" xmlns:p="http://schemas.openxmlformats.org/presentationml/2006/main">
+<p:sld xmlns:r="http://schemas.openxmlformats.org/officeDocument/2006/relationships" xmlns:c="http://schemas.openxmlformats.org/drawingml/2006/chart" xmlns:a="http://schemas.openxmlformats.org/drawingml/2006/main" xmlns:dgm="http://schemas.openxmlformats.org/drawingml/2006/diagram" xmlns:dsp="http://schemas.microsoft.com/office/drawing/2008/diagram" xmlns:p="http://schemas.openxmlformats.org/presentationml/2006/main">
   <p:cSld name="Slide 7">
     <p:bg>
-      <p:bgPr>
+      <p:bgPr shadeToTitle="0">
         <a:solidFill>
-          <a:srgbClr val="ECEAE3"/>
+          <a:srgbClr val="eceae3"/>
         </a:solidFill>
       </p:bgPr>
     </p:bg>
@@ -6685,45 +6497,6 @@
       </p:graphicFrame>
       <p:sp>
         <p:nvSpPr>
-          <p:cNvPr id="9" name="Text 6"/>
-          <p:cNvSpPr txBox="1"/>
-          <p:nvPr/>
-        </p:nvSpPr>
-        <p:spPr>
-          <a:xfrm>
-            <a:off x="812800" y="6223000"/>
-            <a:ext cx="8890000" cy="228600"/>
-          </a:xfrm>
-          <a:prstGeom prst="rect">
-            <a:avLst/>
-          </a:prstGeom>
-          <a:noFill/>
-          <a:ln/>
-        </p:spPr>
-        <p:txBody>
-          <a:bodyPr wrap="square" lIns="0" tIns="0" rIns="0" bIns="0" rtlCol="0" anchor="t"/>
-          <a:lstStyle/>
-          <a:p>
-            <a:pPr eaLnBrk="0" indent="0" marL="0">
-              <a:buNone/>
-            </a:pPr>
-            <a:r>
-              <a:rPr lang="ko-KR" altLang="en-US" sz="1200" dirty="0">
-                <a:solidFill>
-                  <a:srgbClr val="6A7180"/>
-                </a:solidFill>
-                <a:latin typeface="맑은 고딕" pitchFamily="34" charset="0"/>
-                <a:ea typeface="맑은 고딕" pitchFamily="34" charset="-127"/>
-                <a:cs typeface="맑은 고딕" pitchFamily="34" charset="-120"/>
-              </a:rPr>
-              <a:t>발표 이동건</a:t>
-            </a:r>
-            <a:endParaRPr lang="ko-KR" altLang="en-US" sz="1200" dirty="0"/>
-          </a:p>
-        </p:txBody>
-      </p:sp>
-      <p:sp>
-        <p:nvSpPr>
           <p:cNvPr id="10" name="Text 7"/>
           <p:cNvSpPr txBox="1"/>
           <p:nvPr/>
@@ -6770,12 +6543,12 @@
 </file>
 
 <file path=ppt/slides/slide8.xml><?xml version="1.0" encoding="utf-8"?>
-<p:sld xmlns:a="http://schemas.openxmlformats.org/drawingml/2006/main" xmlns:r="http://schemas.openxmlformats.org/officeDocument/2006/relationships" xmlns:p="http://schemas.openxmlformats.org/presentationml/2006/main">
+<p:sld xmlns:r="http://schemas.openxmlformats.org/officeDocument/2006/relationships" xmlns:c="http://schemas.openxmlformats.org/drawingml/2006/chart" xmlns:a="http://schemas.openxmlformats.org/drawingml/2006/main" xmlns:dgm="http://schemas.openxmlformats.org/drawingml/2006/diagram" xmlns:dsp="http://schemas.microsoft.com/office/drawing/2008/diagram" xmlns:p="http://schemas.openxmlformats.org/presentationml/2006/main">
   <p:cSld name="Slide 8">
     <p:bg>
-      <p:bgPr>
+      <p:bgPr shadeToTitle="0">
         <a:solidFill>
-          <a:srgbClr val="ECEAE3"/>
+          <a:srgbClr val="eceae3"/>
         </a:solidFill>
       </p:bgPr>
     </p:bg>
@@ -7285,45 +7058,6 @@
       </p:sp>
       <p:sp>
         <p:nvSpPr>
-          <p:cNvPr id="16" name="Text 14"/>
-          <p:cNvSpPr txBox="1"/>
-          <p:nvPr/>
-        </p:nvSpPr>
-        <p:spPr>
-          <a:xfrm>
-            <a:off x="812800" y="6223000"/>
-            <a:ext cx="8890000" cy="228600"/>
-          </a:xfrm>
-          <a:prstGeom prst="rect">
-            <a:avLst/>
-          </a:prstGeom>
-          <a:noFill/>
-          <a:ln/>
-        </p:spPr>
-        <p:txBody>
-          <a:bodyPr wrap="square" lIns="0" tIns="0" rIns="0" bIns="0" rtlCol="0" anchor="t"/>
-          <a:lstStyle/>
-          <a:p>
-            <a:pPr eaLnBrk="0" indent="0" marL="0">
-              <a:buNone/>
-            </a:pPr>
-            <a:r>
-              <a:rPr lang="ko-KR" altLang="en-US" sz="1200" dirty="0">
-                <a:solidFill>
-                  <a:srgbClr val="6A7180"/>
-                </a:solidFill>
-                <a:latin typeface="맑은 고딕" pitchFamily="34" charset="0"/>
-                <a:ea typeface="맑은 고딕" pitchFamily="34" charset="-127"/>
-                <a:cs typeface="맑은 고딕" pitchFamily="34" charset="-120"/>
-              </a:rPr>
-              <a:t>발표 이동건</a:t>
-            </a:r>
-            <a:endParaRPr lang="ko-KR" altLang="en-US" sz="1200" dirty="0"/>
-          </a:p>
-        </p:txBody>
-      </p:sp>
-      <p:sp>
-        <p:nvSpPr>
           <p:cNvPr id="17" name="Text 15"/>
           <p:cNvSpPr txBox="1"/>
           <p:nvPr/>
@@ -7370,12 +7104,12 @@
 </file>
 
 <file path=ppt/slides/slide9.xml><?xml version="1.0" encoding="utf-8"?>
-<p:sld xmlns:a="http://schemas.openxmlformats.org/drawingml/2006/main" xmlns:r="http://schemas.openxmlformats.org/officeDocument/2006/relationships" xmlns:p="http://schemas.openxmlformats.org/presentationml/2006/main">
+<p:sld xmlns:r="http://schemas.openxmlformats.org/officeDocument/2006/relationships" xmlns:c="http://schemas.openxmlformats.org/drawingml/2006/chart" xmlns:a="http://schemas.openxmlformats.org/drawingml/2006/main" xmlns:dgm="http://schemas.openxmlformats.org/drawingml/2006/diagram" xmlns:dsp="http://schemas.microsoft.com/office/drawing/2008/diagram" xmlns:p="http://schemas.openxmlformats.org/presentationml/2006/main">
   <p:cSld name="Slide 9">
     <p:bg>
-      <p:bgPr>
+      <p:bgPr shadeToTitle="0">
         <a:solidFill>
-          <a:srgbClr val="F7F6F2"/>
+          <a:srgbClr val="f7f6f2"/>
         </a:solidFill>
       </p:bgPr>
     </p:bg>
@@ -7516,24 +7250,32 @@
           <a:ln/>
         </p:spPr>
         <p:txBody>
-          <a:bodyPr wrap="square" lIns="0" tIns="0" rIns="0" bIns="0" rtlCol="0" anchor="t"/>
-          <a:lstStyle/>
-          <a:p>
-            <a:pPr eaLnBrk="0" indent="0" marL="0">
-              <a:buNone/>
-            </a:pPr>
-            <a:r>
-              <a:rPr lang="ko-KR" altLang="en-US" sz="1500" b="1" dirty="0">
-                <a:solidFill>
-                  <a:srgbClr val="2B5FD9"/>
-                </a:solidFill>
-                <a:latin typeface="맑은 고딕" pitchFamily="34" charset="0"/>
-                <a:ea typeface="맑은 고딕" pitchFamily="34" charset="-127"/>
-                <a:cs typeface="맑은 고딕" pitchFamily="34" charset="-120"/>
+          <a:bodyPr wrap="square" lIns="0" tIns="0" rIns="0" bIns="0" anchor="t"/>
+          <a:lstStyle/>
+          <a:p>
+            <a:pPr marL="0" lvl="0" indent="0" eaLnBrk="0">
+              <a:buNone/>
+              <a:defRPr/>
+            </a:pPr>
+            <a:r>
+              <a:rPr lang="ko-KR" altLang="en-US" sz="1500" b="1">
+                <a:solidFill>
+                  <a:srgbClr val="2b5fd9"/>
+                </a:solidFill>
+                <a:latin typeface="맑은 고딕"/>
+                <a:ea typeface="맑은 고딕"/>
+                <a:cs typeface="맑은 고딕"/>
               </a:rPr>
               <a:t>9~10주 · 첫 버전</a:t>
             </a:r>
-            <a:endParaRPr lang="ko-KR" altLang="en-US" sz="1500" dirty="0"/>
+            <a:endParaRPr lang="ko-KR" altLang="en-US" sz="1500" b="1">
+              <a:solidFill>
+                <a:srgbClr val="2b5fd9"/>
+              </a:solidFill>
+              <a:latin typeface="맑은 고딕"/>
+              <a:ea typeface="맑은 고딕"/>
+              <a:cs typeface="맑은 고딕"/>
+            </a:endParaRPr>
           </a:p>
         </p:txBody>
       </p:sp>
@@ -8037,45 +7779,6 @@
       </p:sp>
       <p:sp>
         <p:nvSpPr>
-          <p:cNvPr id="21" name="Text 19"/>
-          <p:cNvSpPr txBox="1"/>
-          <p:nvPr/>
-        </p:nvSpPr>
-        <p:spPr>
-          <a:xfrm>
-            <a:off x="812800" y="6223000"/>
-            <a:ext cx="8890000" cy="228600"/>
-          </a:xfrm>
-          <a:prstGeom prst="rect">
-            <a:avLst/>
-          </a:prstGeom>
-          <a:noFill/>
-          <a:ln/>
-        </p:spPr>
-        <p:txBody>
-          <a:bodyPr wrap="square" lIns="0" tIns="0" rIns="0" bIns="0" rtlCol="0" anchor="t"/>
-          <a:lstStyle/>
-          <a:p>
-            <a:pPr eaLnBrk="0" indent="0" marL="0">
-              <a:buNone/>
-            </a:pPr>
-            <a:r>
-              <a:rPr lang="ko-KR" altLang="en-US" sz="1200" dirty="0">
-                <a:solidFill>
-                  <a:srgbClr val="6A7180"/>
-                </a:solidFill>
-                <a:latin typeface="맑은 고딕" pitchFamily="34" charset="0"/>
-                <a:ea typeface="맑은 고딕" pitchFamily="34" charset="-127"/>
-                <a:cs typeface="맑은 고딕" pitchFamily="34" charset="-120"/>
-              </a:rPr>
-              <a:t>사진 수집과 라벨링은 공동 · 발표 이동건</a:t>
-            </a:r>
-            <a:endParaRPr lang="ko-KR" altLang="en-US" sz="1200" dirty="0"/>
-          </a:p>
-        </p:txBody>
-      </p:sp>
-      <p:sp>
-        <p:nvSpPr>
           <p:cNvPr id="22" name="Text 20"/>
           <p:cNvSpPr txBox="1"/>
           <p:nvPr/>
@@ -8122,44 +7825,44 @@
 </file>
 
 <file path=ppt/theme/theme1.xml><?xml version="1.0" encoding="utf-8"?>
-<a:theme xmlns:a="http://schemas.openxmlformats.org/drawingml/2006/main" name="Office Theme">
+<a:theme xmlns:r="http://schemas.openxmlformats.org/officeDocument/2006/relationships" xmlns:c="http://schemas.openxmlformats.org/drawingml/2006/chart" xmlns:dgm="http://schemas.openxmlformats.org/drawingml/2006/diagram" xmlns:dsp="http://schemas.microsoft.com/office/drawing/2008/diagram" xmlns:a="http://schemas.openxmlformats.org/drawingml/2006/main" xmlns:pic="http://schemas.openxmlformats.org/drawingml/2006/picture" xmlns:wp="http://schemas.openxmlformats.org/drawingml/2006/wordprocessingDrawing" xmlns:xdr="http://schemas.openxmlformats.org/drawingml/2006/spreadsheetDrawing" xmlns:lc="http://schemas.openxmlformats.org/drawingml/2006/lockedCanvas" xmlns:p="http://schemas.openxmlformats.org/presentationml/2006/main" name="Office Theme">
   <a:themeElements>
     <a:clrScheme name="Office">
       <a:dk1>
         <a:sysClr val="windowText" lastClr="000000"/>
       </a:dk1>
       <a:lt1>
-        <a:sysClr val="window" lastClr="FFFFFF"/>
+        <a:sysClr val="window" lastClr="ffffff"/>
       </a:lt1>
       <a:dk2>
-        <a:srgbClr val="44546A"/>
+        <a:srgbClr val="44546a"/>
       </a:dk2>
       <a:lt2>
-        <a:srgbClr val="E7E6E6"/>
+        <a:srgbClr val="e7e6e6"/>
       </a:lt2>
       <a:accent1>
-        <a:srgbClr val="4472C4"/>
+        <a:srgbClr val="4472c4"/>
       </a:accent1>
       <a:accent2>
-        <a:srgbClr val="ED7D31"/>
+        <a:srgbClr val="ed7d31"/>
       </a:accent2>
       <a:accent3>
-        <a:srgbClr val="A5A5A5"/>
+        <a:srgbClr val="a5a5a5"/>
       </a:accent3>
       <a:accent4>
-        <a:srgbClr val="FFC000"/>
+        <a:srgbClr val="ffc000"/>
       </a:accent4>
       <a:accent5>
-        <a:srgbClr val="5B9BD5"/>
+        <a:srgbClr val="5b9bd5"/>
       </a:accent5>
       <a:accent6>
-        <a:srgbClr val="70AD47"/>
+        <a:srgbClr val="70ad47"/>
       </a:accent6>
       <a:hlink>
-        <a:srgbClr val="0563C1"/>
+        <a:srgbClr val="0563c1"/>
       </a:hlink>
       <a:folHlink>
-        <a:srgbClr val="954F72"/>
+        <a:srgbClr val="954f72"/>
       </a:folHlink>
     </a:clrScheme>
     <a:fontScheme name="Office">
@@ -8167,7 +7870,7 @@
         <a:latin typeface="맑은 고딕"/>
         <a:ea typeface=""/>
         <a:cs typeface=""/>
-        <a:font script="Jpan" typeface="游ゴシック Light"/>
+        <a:font script="Jpan" typeface="Yu Gothic Light"/>
         <a:font script="Hang" typeface="맑은 고딕"/>
         <a:font script="Hans" typeface="等线 Light"/>
         <a:font script="Hant" typeface="新細明體"/>
@@ -8219,7 +7922,7 @@
         <a:latin typeface="맑은 고딕"/>
         <a:ea typeface=""/>
         <a:cs typeface=""/>
-        <a:font script="Jpan" typeface="游ゴシック"/>
+        <a:font script="Jpan" typeface="Yu Gothic"/>
         <a:font script="Hang" typeface="맑은 고딕"/>
         <a:font script="Hans" typeface="等线"/>
         <a:font script="Hant" typeface="新細明體"/>
@@ -8332,21 +8035,21 @@
             <a:schemeClr val="phClr"/>
           </a:solidFill>
           <a:prstDash val="solid"/>
-          <a:miter lim="800000"/>
+          <a:miter/>
         </a:ln>
         <a:ln w="12700" cap="flat" cmpd="sng" algn="ctr">
           <a:solidFill>
             <a:schemeClr val="phClr"/>
           </a:solidFill>
           <a:prstDash val="solid"/>
-          <a:miter lim="800000"/>
+          <a:miter/>
         </a:ln>
         <a:ln w="19050" cap="flat" cmpd="sng" algn="ctr">
           <a:solidFill>
             <a:schemeClr val="phClr"/>
           </a:solidFill>
           <a:prstDash val="solid"/>
-          <a:miter lim="800000"/>
+          <a:miter/>
         </a:ln>
       </a:lnStyleLst>
       <a:effectStyleLst>
@@ -8406,12 +8109,272 @@
       </a:bgFillStyleLst>
     </a:fmtScheme>
   </a:themeElements>
-  <a:objectDefaults/>
-  <a:extraClrSchemeLst/>
-  <a:extLst>
-    <a:ext uri="{05A4C25C-085E-4340-85A3-A5531E510DB2}">
-      <thm15:themeFamily xmlns:thm15="http://schemas.microsoft.com/office/thememl/2012/main" name="Office Theme" id="{62F939B6-93AF-4DB8-9C6B-D6C7DFDC589F}" vid="{4A3C46E8-61CC-4603-A589-7422A47A8E4A}"/>
-    </a:ext>
-  </a:extLst>
+</a:theme>
+</file>
+
+<file path=ppt/theme/theme2.xml><?xml version="1.0" encoding="utf-8"?>
+<a:theme xmlns:r="http://schemas.openxmlformats.org/officeDocument/2006/relationships" xmlns:c="http://schemas.openxmlformats.org/drawingml/2006/chart" xmlns:dgm="http://schemas.openxmlformats.org/drawingml/2006/diagram" xmlns:dsp="http://schemas.microsoft.com/office/drawing/2008/diagram" xmlns:a="http://schemas.openxmlformats.org/drawingml/2006/main" xmlns:pic="http://schemas.openxmlformats.org/drawingml/2006/picture" xmlns:wp="http://schemas.openxmlformats.org/drawingml/2006/wordprocessingDrawing" xmlns:xdr="http://schemas.openxmlformats.org/drawingml/2006/spreadsheetDrawing" xmlns:lc="http://schemas.openxmlformats.org/drawingml/2006/lockedCanvas" xmlns:p="http://schemas.openxmlformats.org/presentationml/2006/main" name="한컴오피스">
+  <a:themeElements>
+    <a:clrScheme name="한컴오피스">
+      <a:dk1>
+        <a:sysClr val="windowText" lastClr="000000"/>
+      </a:dk1>
+      <a:lt1>
+        <a:sysClr val="window" lastClr="ffffff"/>
+      </a:lt1>
+      <a:dk2>
+        <a:srgbClr val="3a3c84"/>
+      </a:dk2>
+      <a:lt2>
+        <a:srgbClr val="faf3db"/>
+      </a:lt2>
+      <a:accent1>
+        <a:srgbClr val="6182d6"/>
+      </a:accent1>
+      <a:accent2>
+        <a:srgbClr val="ff843a"/>
+      </a:accent2>
+      <a:accent3>
+        <a:srgbClr val="b2b2b2"/>
+      </a:accent3>
+      <a:accent4>
+        <a:srgbClr val="ffd700"/>
+      </a:accent4>
+      <a:accent5>
+        <a:srgbClr val="289b6e"/>
+      </a:accent5>
+      <a:accent6>
+        <a:srgbClr val="9d5cbb"/>
+      </a:accent6>
+      <a:hlink>
+        <a:srgbClr val="4a45ff"/>
+      </a:hlink>
+      <a:folHlink>
+        <a:srgbClr val="be27bb"/>
+      </a:folHlink>
+    </a:clrScheme>
+    <a:fontScheme name="한컴오피스">
+      <a:majorFont>
+        <a:latin typeface="Calibri"/>
+        <a:ea typeface=""/>
+        <a:cs typeface=""/>
+        <a:font script="Jpan" typeface="MS PGothic"/>
+        <a:font script="Hang" typeface="맑은 고딕"/>
+        <a:font script="Hans" typeface="SimSun"/>
+        <a:font script="Hant" typeface="新細明體"/>
+        <a:font script="Arab" typeface="Times New Roman"/>
+        <a:font script="Hebr" typeface="Times New Roman"/>
+        <a:font script="Thai" typeface="Angsana New"/>
+        <a:font script="Beng" typeface="Vrinda"/>
+        <a:font script="Gujr" typeface="Shruti"/>
+        <a:font script="Khmr" typeface="MoolBoran"/>
+        <a:font script="Knda" typeface="Tunga"/>
+        <a:font script="Guru" typeface="Raavi"/>
+        <a:font script="Cans" typeface="Euphemia"/>
+        <a:font script="Cher" typeface="Plantagenet Cherokee"/>
+        <a:font script="Yiii" typeface="Microsoft Yi Baiti"/>
+        <a:font script="Tibt" typeface="Microsoft Himalaya"/>
+        <a:font script="Thaa" typeface="MV Boli"/>
+        <a:font script="Deva" typeface="Mangal"/>
+        <a:font script="Telu" typeface="Gautami"/>
+        <a:font script="Taml" typeface="Latha"/>
+        <a:font script="Syrc" typeface="Estrangelo Edessa"/>
+        <a:font script="Orya" typeface="Kalinga"/>
+        <a:font script="Mlym" typeface="Kartika"/>
+        <a:font script="Laoo" typeface="DokChampa"/>
+        <a:font script="Sinh" typeface="Iskoola Pota"/>
+        <a:font script="Mong" typeface="Mongolian Baiti"/>
+        <a:font script="Viet" typeface="Times New Roman"/>
+        <a:font script="Uigh" typeface="Microsoft Uighur"/>
+        <a:font script="Ethi" typeface="Leelawadee UI"/>
+        <a:font script="Mymr" typeface="Myanmar Text"/>
+      </a:majorFont>
+      <a:minorFont>
+        <a:latin typeface="Calibri"/>
+        <a:ea typeface=""/>
+        <a:cs typeface=""/>
+        <a:font script="Jpan" typeface="MS PGothic"/>
+        <a:font script="Hang" typeface="맑은 고딕"/>
+        <a:font script="Hans" typeface="SimSun"/>
+        <a:font script="Hant" typeface="新細明體"/>
+        <a:font script="Arab" typeface="Times New Roman"/>
+        <a:font script="Hebr" typeface="Times New Roman"/>
+        <a:font script="Thai" typeface="Angsana New"/>
+        <a:font script="Beng" typeface="Vrinda"/>
+        <a:font script="Gujr" typeface="Shruti"/>
+        <a:font script="Khmr" typeface="MoolBoran"/>
+        <a:font script="Knda" typeface="Tunga"/>
+        <a:font script="Guru" typeface="Raavi"/>
+        <a:font script="Cans" typeface="Euphemia"/>
+        <a:font script="Cher" typeface="Plantagenet Cherokee"/>
+        <a:font script="Yiii" typeface="Microsoft Yi Baiti"/>
+        <a:font script="Tibt" typeface="Microsoft Himalaya"/>
+        <a:font script="Thaa" typeface="MV Boli"/>
+        <a:font script="Deva" typeface="Mangal"/>
+        <a:font script="Telu" typeface="Gautami"/>
+        <a:font script="Taml" typeface="Latha"/>
+        <a:font script="Syrc" typeface="Estrangelo Edessa"/>
+        <a:font script="Orya" typeface="Kalinga"/>
+        <a:font script="Mlym" typeface="Kartika"/>
+        <a:font script="Laoo" typeface="DokChampa"/>
+        <a:font script="Sinh" typeface="Iskoola Pota"/>
+        <a:font script="Mong" typeface="Mongolian Baiti"/>
+        <a:font script="Viet" typeface="Times New Roman"/>
+        <a:font script="Uigh" typeface="Microsoft Uighur"/>
+        <a:font script="Ethi" typeface="Leelawadee UI"/>
+        <a:font script="Mymr" typeface="Myanmar Text"/>
+      </a:minorFont>
+    </a:fontScheme>
+    <a:fmtScheme name="한컴오피스">
+      <a:fillStyleLst>
+        <a:solidFill>
+          <a:schemeClr val="phClr"/>
+        </a:solidFill>
+        <a:gradFill rotWithShape="1">
+          <a:gsLst>
+            <a:gs pos="0">
+              <a:schemeClr val="phClr">
+                <a:tint val="50000"/>
+                <a:satMod val="300000"/>
+              </a:schemeClr>
+            </a:gs>
+            <a:gs pos="35000">
+              <a:schemeClr val="phClr">
+                <a:tint val="37000"/>
+                <a:satMod val="300000"/>
+              </a:schemeClr>
+            </a:gs>
+            <a:gs pos="100000">
+              <a:schemeClr val="phClr">
+                <a:tint val="15000"/>
+                <a:satMod val="350000"/>
+              </a:schemeClr>
+            </a:gs>
+          </a:gsLst>
+          <a:lin ang="16200000" scaled="1"/>
+        </a:gradFill>
+        <a:gradFill rotWithShape="1">
+          <a:gsLst>
+            <a:gs pos="0">
+              <a:schemeClr val="phClr">
+                <a:shade val="51000"/>
+                <a:satMod val="130000"/>
+              </a:schemeClr>
+            </a:gs>
+            <a:gs pos="80000">
+              <a:schemeClr val="phClr">
+                <a:shade val="93000"/>
+                <a:satMod val="130000"/>
+              </a:schemeClr>
+            </a:gs>
+            <a:gs pos="100000">
+              <a:schemeClr val="phClr">
+                <a:shade val="94000"/>
+                <a:satMod val="135000"/>
+              </a:schemeClr>
+            </a:gs>
+          </a:gsLst>
+          <a:lin ang="16200000" scaled="0"/>
+        </a:gradFill>
+      </a:fillStyleLst>
+      <a:lnStyleLst>
+        <a:ln w="12700" cap="flat" cmpd="sng" algn="ctr">
+          <a:solidFill>
+            <a:schemeClr val="phClr">
+              <a:satMod val="105000"/>
+            </a:schemeClr>
+          </a:solidFill>
+          <a:prstDash val="solid"/>
+        </a:ln>
+        <a:ln w="19050" cap="flat" cmpd="sng" algn="ctr">
+          <a:solidFill>
+            <a:schemeClr val="phClr"/>
+          </a:solidFill>
+          <a:prstDash val="solid"/>
+        </a:ln>
+        <a:ln w="38100" cap="flat" cmpd="sng" algn="ctr">
+          <a:solidFill>
+            <a:schemeClr val="phClr"/>
+          </a:solidFill>
+          <a:prstDash val="solid"/>
+        </a:ln>
+      </a:lnStyleLst>
+      <a:effectStyleLst>
+        <a:effectStyle>
+          <a:effectLst>
+            <a:outerShdw blurRad="38100" dist="25400" dir="5400000" rotWithShape="0">
+              <a:srgbClr val="000000">
+                <a:alpha val="75000"/>
+              </a:srgbClr>
+            </a:outerShdw>
+          </a:effectLst>
+        </a:effectStyle>
+        <a:effectStyle>
+          <a:effectLst>
+            <a:outerShdw blurRad="38100" dist="25400" dir="5400000" rotWithShape="0">
+              <a:srgbClr val="000000">
+                <a:alpha val="75000"/>
+              </a:srgbClr>
+            </a:outerShdw>
+          </a:effectLst>
+        </a:effectStyle>
+        <a:effectStyle>
+          <a:effectLst>
+            <a:reflection blurRad="12700" stA="26000" endPos="28000" dist="38100" dir="5400000" sy="-100000" rotWithShape="0"/>
+          </a:effectLst>
+        </a:effectStyle>
+      </a:effectStyleLst>
+      <a:bgFillStyleLst>
+        <a:solidFill>
+          <a:schemeClr val="phClr"/>
+        </a:solidFill>
+        <a:gradFill rotWithShape="1">
+          <a:gsLst>
+            <a:gs pos="0">
+              <a:schemeClr val="phClr">
+                <a:tint val="40000"/>
+                <a:satMod val="350000"/>
+              </a:schemeClr>
+            </a:gs>
+            <a:gs pos="40000">
+              <a:schemeClr val="phClr">
+                <a:tint val="45000"/>
+                <a:shade val="99000"/>
+                <a:satMod val="350000"/>
+              </a:schemeClr>
+            </a:gs>
+            <a:gs pos="100000">
+              <a:schemeClr val="phClr">
+                <a:shade val="20000"/>
+                <a:satMod val="255000"/>
+              </a:schemeClr>
+            </a:gs>
+          </a:gsLst>
+          <a:path path="circle">
+            <a:fillToRect l="50000" t="-80000" r="50000" b="180000"/>
+          </a:path>
+        </a:gradFill>
+        <a:gradFill rotWithShape="1">
+          <a:gsLst>
+            <a:gs pos="0">
+              <a:schemeClr val="phClr">
+                <a:tint val="80000"/>
+                <a:satMod val="300000"/>
+              </a:schemeClr>
+            </a:gs>
+            <a:gs pos="100000">
+              <a:schemeClr val="phClr">
+                <a:shade val="30000"/>
+                <a:satMod val="200000"/>
+              </a:schemeClr>
+            </a:gs>
+          </a:gsLst>
+          <a:path path="circle">
+            <a:fillToRect l="50000" t="50000" r="50000" b="50000"/>
+          </a:path>
+        </a:gradFill>
+      </a:bgFillStyleLst>
+    </a:fmtScheme>
+  </a:themeElements>
 </a:theme>
 </file>
--- a/자료/발표자료-KIOSSON.pptx
+++ b/자료/발표자료-KIOSSON.pptx
@@ -696,7 +696,7 @@
             <a:r>
               <a:rPr lang="en-US" dirty="0"/>
               <a:t>[정윤서 · 약 35초]
-국내 키오스크는 2019년에서 2022년 사이 2.4배 늘었습니다. 하지만 서울 고령층의 59.6%가 키오스크를 쓰면서 어려움을 겪었다고 답했습니다. 장애인 이용자는 버튼 위치를 찾고 메뉴를 고르는 것이 불편하다고 했습니다. 매장마다 화면 구성이 다르고 단계가 많기 때문입니다. 그래서 많은 분들이 주문을 포기하거나, 뒷사람 눈치를 보며 다른 사람에게 도움을 청하게 됩니다.</a:t>
+국내 키오스크는 2019년에서 2022년 사이 2.4배 늘었습니다. 하지만 서울에서 65세에서 74세는 절반 정도만, 75세 이상은 다섯 명 중 한 명만 키오스크를 써 본 적이 있습니다. 장애인 이용자는 버튼 위치를 찾고 메뉴를 고르는 것이 불편하다고 했습니다. 매장마다 화면 구성이 다르고 단계가 많기 때문입니다. 그래서 많은 분들이 주문을 포기하거나, 뒷사람 눈치를 보며 다른 사람에게 도움을 청하게 됩니다.</a:t>
             </a:r>
             <a:endParaRPr lang="en-US" dirty="0"/>
           </a:p>
@@ -785,7 +785,7 @@
             <a:r>
               <a:rPr lang="en-US" dirty="0"/>
               <a:t>[정윤서 · 약 30초]
-지금도 해결책은 있습니다. 배리어프리 키오스크는 기기를 바꿔야 해서 보급이 느리고, 연습 앱은 가상 화면이라 실제 매장 화면과 다릅니다. 직원 도움은 무인 매장이나 바쁜 시간에는 받기 어렵습니다. 모두 키오스크 쪽에서 풀려는 방법입니다. 저희는 반대로, 키오스크는 그대로 두고 사용자의 휴대폰 쪽에서 문제를 풀기로 했습니다.</a:t>
+지금도 해결책은 있습니다. 배리어프리 키오스크는 기기를 바꿔야 해서 보급이 느리고, 연습 앱은 가상 화면이라 실제 매장 화면과 다릅니다. 직원 도움은 무인 매장이나 바쁜 시간에는 받기 어렵습니다. 이 방법들은 모두 키오스크에서 문제를 해결하려는 방식입니다. 저희는 키오스크가 아닌 사용자의 휴대폰으로 이 문제를 해결하고자 이 서비스를 기획했습니다.</a:t>
             </a:r>
             <a:endParaRPr lang="en-US" dirty="0"/>
           </a:p>
@@ -1142,7 +1142,7 @@
             <a:r>
               <a:rPr lang="en-US" dirty="0"/>
               <a:t>[이동건 · 약 35초]
-성능은 저희가 직접 만든 데이터로 측정합니다. 학교 주변 매장 10곳 이상에서 키오스크 화면 200장 이상을 찍고, 실제 사용과 비슷하도록 짧은 영상에서 고른 장면도 함께 넣어 정답 버튼을 표시합니다. 목표는 버튼 안내 정확도 70% 이상, 위치 정확도 60% 이상, 화면이 바뀐 뒤 새 안내까지 5초 이내입니다. 또 55세 이상 참가자 다섯 명 이상과 실제 매장에서 주문 완료율을 잽니다. 모델 크기와 상용 API도 같은 데이터로 비교해서, 어떤 방식이 가장 나은지 수치로 보여 드리겠습니다.</a:t>
+성능은 저희가 직접 만든 데이터로 측정합니다. 학교 주변 매장 10곳 이상에서 키오스크 화면 200장 이상을 찍고, 실제 사용 환경과 비슷하도록 짧은 영상에서 고른 장면도 함께 넣어 정답 버튼을 표시합니다. 목표는 버튼 안내 정확도 70% 이상, 위치 정확도 60% 이상, 그리고 화면이 바뀐 뒤 5초 안에 새 안내를 보여 주는 것입니다. 또 모델 크기와 상용 API를 같은 데이터로 비교해, 어떤 방식이 가장 나은지 수치로 보여 드리겠습니다.</a:t>
             </a:r>
             <a:endParaRPr lang="en-US" dirty="0"/>
           </a:p>
@@ -1320,7 +1320,7 @@
             <a:r>
               <a:rPr lang="en-US" dirty="0"/>
               <a:t>[이동건 · 약 35초]
-일정은 9주부터 15주까지입니다. 9주에서 10주에는 사진을 올리면 눌러야 할 버튼을 글로 안내하는 첫 버전을 배포합니다. 12주 Sprint 2 평가까지는 찍기 버튼 없이 카메라를 비추기만 하면, 실시간 화면의 버튼 표시와 음성 안내를 받으며 주문을 끝까지 하는 버전을 만듭니다. 15주 Sprint 3 평가까지는 고령자 사용성 테스트와 개선 전후 성능 비교까지 마칩니다. 저는 AI 서버와 평가를, 정윤서 팀장은 웹 화면과 배포, 사용성 테스트를 맡고, 사진 수집과 라벨링은 함께 합니다.</a:t>
+일정은 9주부터 15주까지입니다. 9주에서 10주에는 사진을 올리면 눌러야 할 버튼을 글로 안내하는 첫 버전을 배포합니다. 12주 Sprint 2 평가까지는 찍기 버튼 없이 카메라를 비추기만 하면, 실시간 화면의 버튼 표시와 음성 안내를 받으며 주문을 끝까지 하는 버전을 만듭니다. 15주 Sprint 3 평가까지는 오류를 다듬어 최종 배포하고, 개선 전후 성능 비교까지 마칩니다.</a:t>
             </a:r>
             <a:endParaRPr lang="en-US" dirty="0"/>
           </a:p>
@@ -2531,7 +2531,7 @@
                 <a:ea typeface="맑은 고딕" pitchFamily="34" charset="-127"/>
                 <a:cs typeface="맑은 고딕" pitchFamily="34" charset="-120"/>
               </a:rPr>
-              <a:t>59.6%</a:t>
+              <a:t>50.4%</a:t>
             </a:r>
             <a:endParaRPr lang="ko-KR" altLang="en-US" sz="6000" dirty="0"/>
           </a:p>
@@ -2573,7 +2573,7 @@
                 <a:ea typeface="맑은 고딕" pitchFamily="34" charset="-127"/>
                 <a:cs typeface="맑은 고딕" pitchFamily="34" charset="-120"/>
               </a:rPr>
-              <a:t>서울 고령층(55세 이상)이</a:t>
+              <a:t>서울 65~74세의 이용 경험률</a:t>
             </a:r>
             <a:endParaRPr lang="ko-KR" altLang="en-US" sz="1600" dirty="0"/>
           </a:p>
@@ -2593,7 +2593,7 @@
                 <a:ea typeface="맑은 고딕" pitchFamily="34" charset="-127"/>
                 <a:cs typeface="맑은 고딕" pitchFamily="34" charset="-120"/>
               </a:rPr>
-              <a:t>키오스크 이용 중 어려움을 겪음</a:t>
+              <a:t>(75세 이상은 19.1%)</a:t>
             </a:r>
             <a:endParaRPr lang="ko-KR" altLang="en-US" sz="1600" dirty="0"/>
           </a:p>
@@ -2761,7 +2761,7 @@
                 <a:ea typeface="맑은 고딕"/>
                 <a:cs typeface="맑은 고딕"/>
               </a:rPr>
-              <a:t>출처: 과학기술정보통신부(이투데이), 서울디지털재단 2023, 보건복지부 2024 ·</a:t>
+              <a:t>출처: 과학기술정보통신부(이투데이), 서울디지털재단 2023, 보건복지부 2024</a:t>
             </a:r>
             <a:endParaRPr lang="ko-KR" altLang="en-US" sz="1200"/>
           </a:p>
@@ -3339,7 +3339,7 @@
                 <a:ea typeface="맑은 고딕" pitchFamily="34" charset="-127"/>
                 <a:cs typeface="맑은 고딕" pitchFamily="34" charset="-120"/>
               </a:rPr>
-              <a:t>키오스크는 그대로 두고, </a:t>
+              <a:t>키오스크가 아닌, </a:t>
             </a:r>
             <a:pPr eaLnBrk="0" indent="0" marL="0">
               <a:buNone/>
@@ -5891,212 +5891,6 @@
                           <a:ea typeface="맑은 고딕" pitchFamily="34" charset="-127"/>
                           <a:cs typeface="맑은 고딕" pitchFamily="34" charset="-120"/>
                         </a:rPr>
-                        <a:t>주문 완료율</a:t>
-                      </a:r>
-                      <a:endParaRPr lang="ko-KR" altLang="en-US" sz="1500" dirty="0">
-                        <a:latin typeface="맑은 고딕" charset="0"/>
-                        <a:ea typeface="맑은 고딕" charset="0"/>
-                        <a:cs typeface="맑은 고딕" charset="0"/>
-                      </a:endParaRPr>
-                    </a:p>
-                  </a:txBody>
-                  <a:tcPr marL="91440" marR="91440" marT="91440" marB="91440" anchor="ctr">
-                    <a:lnL w="12700" cap="flat" cmpd="sng" algn="ctr">
-                      <a:solidFill>
-                        <a:srgbClr val="E2DFD6"/>
-                      </a:solidFill>
-                      <a:prstDash val="solid"/>
-                      <a:round/>
-                      <a:headEnd type="none" w="med" len="med"/>
-                      <a:tailEnd type="none" w="med" len="med"/>
-                    </a:lnL>
-                    <a:lnR w="12700" cap="flat" cmpd="sng" algn="ctr">
-                      <a:solidFill>
-                        <a:srgbClr val="E2DFD6"/>
-                      </a:solidFill>
-                      <a:prstDash val="solid"/>
-                      <a:round/>
-                      <a:headEnd type="none" w="med" len="med"/>
-                      <a:tailEnd type="none" w="med" len="med"/>
-                    </a:lnR>
-                    <a:lnT w="12700" cap="flat" cmpd="sng" algn="ctr">
-                      <a:solidFill>
-                        <a:srgbClr val="E2DFD6"/>
-                      </a:solidFill>
-                      <a:prstDash val="solid"/>
-                      <a:round/>
-                      <a:headEnd type="none" w="med" len="med"/>
-                      <a:tailEnd type="none" w="med" len="med"/>
-                    </a:lnT>
-                    <a:lnB w="12700" cap="flat" cmpd="sng" algn="ctr">
-                      <a:solidFill>
-                        <a:srgbClr val="E2DFD6"/>
-                      </a:solidFill>
-                      <a:prstDash val="solid"/>
-                      <a:round/>
-                      <a:headEnd type="none" w="med" len="med"/>
-                      <a:tailEnd type="none" w="med" len="med"/>
-                    </a:lnB>
-                    <a:solidFill>
-                      <a:srgbClr val="FDFCF9"/>
-                    </a:solidFill>
-                  </a:tcPr>
-                </a:tc>
-                <a:tc>
-                  <a:txBody>
-                    <a:bodyPr/>
-                    <a:lstStyle/>
-                    <a:p>
-                      <a:pPr eaLnBrk="0" indent="0" marL="0">
-                        <a:buNone/>
-                      </a:pPr>
-                      <a:r>
-                        <a:rPr lang="ko-KR" altLang="en-US" sz="1500" dirty="0">
-                          <a:solidFill>
-                            <a:srgbClr val="172033"/>
-                          </a:solidFill>
-                          <a:latin typeface="맑은 고딕" pitchFamily="34" charset="0"/>
-                          <a:ea typeface="맑은 고딕" pitchFamily="34" charset="-127"/>
-                          <a:cs typeface="맑은 고딕" pitchFamily="34" charset="-120"/>
-                        </a:rPr>
-                        <a:t>55세 이상 5명, 매장 2곳</a:t>
-                      </a:r>
-                      <a:endParaRPr lang="ko-KR" altLang="en-US" sz="1500" dirty="0">
-                        <a:latin typeface="맑은 고딕" charset="0"/>
-                        <a:ea typeface="맑은 고딕" charset="0"/>
-                        <a:cs typeface="맑은 고딕" charset="0"/>
-                      </a:endParaRPr>
-                    </a:p>
-                  </a:txBody>
-                  <a:tcPr marL="91440" marR="91440" marT="91440" marB="91440" anchor="ctr">
-                    <a:lnL w="12700" cap="flat" cmpd="sng" algn="ctr">
-                      <a:solidFill>
-                        <a:srgbClr val="E2DFD6"/>
-                      </a:solidFill>
-                      <a:prstDash val="solid"/>
-                      <a:round/>
-                      <a:headEnd type="none" w="med" len="med"/>
-                      <a:tailEnd type="none" w="med" len="med"/>
-                    </a:lnL>
-                    <a:lnR w="12700" cap="flat" cmpd="sng" algn="ctr">
-                      <a:solidFill>
-                        <a:srgbClr val="E2DFD6"/>
-                      </a:solidFill>
-                      <a:prstDash val="solid"/>
-                      <a:round/>
-                      <a:headEnd type="none" w="med" len="med"/>
-                      <a:tailEnd type="none" w="med" len="med"/>
-                    </a:lnR>
-                    <a:lnT w="12700" cap="flat" cmpd="sng" algn="ctr">
-                      <a:solidFill>
-                        <a:srgbClr val="E2DFD6"/>
-                      </a:solidFill>
-                      <a:prstDash val="solid"/>
-                      <a:round/>
-                      <a:headEnd type="none" w="med" len="med"/>
-                      <a:tailEnd type="none" w="med" len="med"/>
-                    </a:lnT>
-                    <a:lnB w="12700" cap="flat" cmpd="sng" algn="ctr">
-                      <a:solidFill>
-                        <a:srgbClr val="E2DFD6"/>
-                      </a:solidFill>
-                      <a:prstDash val="solid"/>
-                      <a:round/>
-                      <a:headEnd type="none" w="med" len="med"/>
-                      <a:tailEnd type="none" w="med" len="med"/>
-                    </a:lnB>
-                    <a:solidFill>
-                      <a:srgbClr val="FDFCF9"/>
-                    </a:solidFill>
-                  </a:tcPr>
-                </a:tc>
-                <a:tc>
-                  <a:txBody>
-                    <a:bodyPr/>
-                    <a:lstStyle/>
-                    <a:p>
-                      <a:pPr eaLnBrk="0" indent="0" marL="0">
-                        <a:buNone/>
-                      </a:pPr>
-                      <a:r>
-                        <a:rPr lang="ko-KR" altLang="en-US" sz="1500" dirty="0">
-                          <a:solidFill>
-                            <a:srgbClr val="172033"/>
-                          </a:solidFill>
-                          <a:latin typeface="맑은 고딕" pitchFamily="34" charset="0"/>
-                          <a:ea typeface="맑은 고딕" pitchFamily="34" charset="-127"/>
-                          <a:cs typeface="맑은 고딕" pitchFamily="34" charset="-120"/>
-                        </a:rPr>
-                        <a:t>60% 이상</a:t>
-                      </a:r>
-                      <a:endParaRPr lang="ko-KR" altLang="en-US" sz="1500" dirty="0">
-                        <a:latin typeface="맑은 고딕" charset="0"/>
-                        <a:ea typeface="맑은 고딕" charset="0"/>
-                        <a:cs typeface="맑은 고딕" charset="0"/>
-                      </a:endParaRPr>
-                    </a:p>
-                  </a:txBody>
-                  <a:tcPr marL="91440" marR="91440" marT="91440" marB="91440" anchor="ctr">
-                    <a:lnL w="12700" cap="flat" cmpd="sng" algn="ctr">
-                      <a:solidFill>
-                        <a:srgbClr val="E2DFD6"/>
-                      </a:solidFill>
-                      <a:prstDash val="solid"/>
-                      <a:round/>
-                      <a:headEnd type="none" w="med" len="med"/>
-                      <a:tailEnd type="none" w="med" len="med"/>
-                    </a:lnL>
-                    <a:lnR w="12700" cap="flat" cmpd="sng" algn="ctr">
-                      <a:solidFill>
-                        <a:srgbClr val="E2DFD6"/>
-                      </a:solidFill>
-                      <a:prstDash val="solid"/>
-                      <a:round/>
-                      <a:headEnd type="none" w="med" len="med"/>
-                      <a:tailEnd type="none" w="med" len="med"/>
-                    </a:lnR>
-                    <a:lnT w="12700" cap="flat" cmpd="sng" algn="ctr">
-                      <a:solidFill>
-                        <a:srgbClr val="E2DFD6"/>
-                      </a:solidFill>
-                      <a:prstDash val="solid"/>
-                      <a:round/>
-                      <a:headEnd type="none" w="med" len="med"/>
-                      <a:tailEnd type="none" w="med" len="med"/>
-                    </a:lnT>
-                    <a:lnB w="12700" cap="flat" cmpd="sng" algn="ctr">
-                      <a:solidFill>
-                        <a:srgbClr val="E2DFD6"/>
-                      </a:solidFill>
-                      <a:prstDash val="solid"/>
-                      <a:round/>
-                      <a:headEnd type="none" w="med" len="med"/>
-                      <a:tailEnd type="none" w="med" len="med"/>
-                    </a:lnB>
-                    <a:solidFill>
-                      <a:srgbClr val="FDFCF9"/>
-                    </a:solidFill>
-                  </a:tcPr>
-                </a:tc>
-              </a:tr>
-              <a:tr h="558800">
-                <a:tc>
-                  <a:txBody>
-                    <a:bodyPr/>
-                    <a:lstStyle/>
-                    <a:p>
-                      <a:pPr eaLnBrk="0" indent="0" marL="0">
-                        <a:buNone/>
-                      </a:pPr>
-                      <a:r>
-                        <a:rPr lang="ko-KR" altLang="en-US" sz="1500" dirty="0">
-                          <a:solidFill>
-                            <a:srgbClr val="172033"/>
-                          </a:solidFill>
-                          <a:latin typeface="맑은 고딕" pitchFamily="34" charset="0"/>
-                          <a:ea typeface="맑은 고딕" pitchFamily="34" charset="-127"/>
-                          <a:cs typeface="맑은 고딕" pitchFamily="34" charset="-120"/>
-                        </a:rPr>
                         <a:t>응답 시간</a:t>
                       </a:r>
                       <a:endParaRPr lang="ko-KR" altLang="en-US" sz="1500" dirty="0">
@@ -7531,7 +7325,7 @@
                 <a:ea typeface="맑은 고딕" pitchFamily="34" charset="-127"/>
                 <a:cs typeface="맑은 고딕" pitchFamily="34" charset="-120"/>
               </a:rPr>
-              <a:t>고령자 사용성 테스트, 개선 전후 성능 비교</a:t>
+              <a:t>오류 처리와 최종 배포, 개선 전후 성능 비교</a:t>
             </a:r>
             <a:endParaRPr lang="ko-KR" altLang="en-US" sz="1500" dirty="0"/>
           </a:p>
@@ -7771,7 +7565,7 @@
                 <a:ea typeface="맑은 고딕" pitchFamily="34" charset="-127"/>
                 <a:cs typeface="맑은 고딕" pitchFamily="34" charset="-120"/>
               </a:rPr>
-              <a:t>화면, 음성, API, 배포, 사용성 테스트</a:t>
+              <a:t>화면, 음성, API, DB, 배포</a:t>
             </a:r>
             <a:endParaRPr lang="ko-KR" altLang="en-US" sz="1400" dirty="0"/>
           </a:p>
